--- a/output/presentations/jumysai-fascination-ru/output/output.pptx
+++ b/output/presentations/jumysai-fascination-ru/output/output.pptx
@@ -2,21 +2,21 @@
 <file path=ppt/presentation.xml><?xml version="1.0" encoding="utf-8"?>
 <p:presentation xmlns:p="http://schemas.openxmlformats.org/presentationml/2006/main">
   <p:sldMasterIdLst>
-    <p:sldMasterId xmlns:r="http://schemas.openxmlformats.org/officeDocument/2006/relationships" id="2147483648" r:id="R4a3ce75432f24b69"/>
+    <p:sldMasterId xmlns:r="http://schemas.openxmlformats.org/officeDocument/2006/relationships" id="2147483648" r:id="R51edb203f9aa4556"/>
   </p:sldMasterIdLst>
   <p:notesMasterIdLst>
-    <p:notesMasterId xmlns:r="http://schemas.openxmlformats.org/officeDocument/2006/relationships" r:id="Rf217e74ca51f438b"/>
+    <p:notesMasterId xmlns:r="http://schemas.openxmlformats.org/officeDocument/2006/relationships" r:id="Rbc31afd286bd4812"/>
   </p:notesMasterIdLst>
   <p:sldIdLst>
-    <p:sldId xmlns:r="http://schemas.openxmlformats.org/officeDocument/2006/relationships" id="256" r:id="R8e3cb747080a4753"/>
-    <p:sldId xmlns:r="http://schemas.openxmlformats.org/officeDocument/2006/relationships" id="257" r:id="R8d8f51534f164430"/>
-    <p:sldId xmlns:r="http://schemas.openxmlformats.org/officeDocument/2006/relationships" id="258" r:id="Re74ef98415094aa2"/>
-    <p:sldId xmlns:r="http://schemas.openxmlformats.org/officeDocument/2006/relationships" id="259" r:id="Rd14a0a7d3b3c4359"/>
-    <p:sldId xmlns:r="http://schemas.openxmlformats.org/officeDocument/2006/relationships" id="260" r:id="R5bcf58554672496d"/>
-    <p:sldId xmlns:r="http://schemas.openxmlformats.org/officeDocument/2006/relationships" id="261" r:id="R0e919836bbd14949"/>
-    <p:sldId xmlns:r="http://schemas.openxmlformats.org/officeDocument/2006/relationships" id="262" r:id="R891cda0428e14ab1"/>
-    <p:sldId xmlns:r="http://schemas.openxmlformats.org/officeDocument/2006/relationships" id="263" r:id="Rd9dd8bc12f224d92"/>
-    <p:sldId xmlns:r="http://schemas.openxmlformats.org/officeDocument/2006/relationships" id="264" r:id="Ra9ed6e41c2184aa9"/>
+    <p:sldId xmlns:r="http://schemas.openxmlformats.org/officeDocument/2006/relationships" id="256" r:id="Ra5c622adf0c640ce"/>
+    <p:sldId xmlns:r="http://schemas.openxmlformats.org/officeDocument/2006/relationships" id="257" r:id="Rf638b3d9e61546da"/>
+    <p:sldId xmlns:r="http://schemas.openxmlformats.org/officeDocument/2006/relationships" id="258" r:id="Rea640734962046c4"/>
+    <p:sldId xmlns:r="http://schemas.openxmlformats.org/officeDocument/2006/relationships" id="259" r:id="R4685df826cd94568"/>
+    <p:sldId xmlns:r="http://schemas.openxmlformats.org/officeDocument/2006/relationships" id="260" r:id="R86bccaa4e62d4140"/>
+    <p:sldId xmlns:r="http://schemas.openxmlformats.org/officeDocument/2006/relationships" id="261" r:id="Re2e264832e1b47ba"/>
+    <p:sldId xmlns:r="http://schemas.openxmlformats.org/officeDocument/2006/relationships" id="262" r:id="R5e0c23d9fd1149e2"/>
+    <p:sldId xmlns:r="http://schemas.openxmlformats.org/officeDocument/2006/relationships" id="263" r:id="R814a7ee7b4c1406e"/>
+    <p:sldId xmlns:r="http://schemas.openxmlformats.org/officeDocument/2006/relationships" id="264" r:id="Rc105ebd11051424c"/>
   </p:sldIdLst>
   <p:sldSz cx="18288000" cy="10287000"/>
   <p:notesSz cx="6858000" cy="9144000"/>
@@ -1091,7 +1091,7 @@
   </p:cSld>
   <p:clrMap bg1="lt1" tx1="dk1" bg2="lt2" tx2="dk2" accent1="accent1" accent2="accent2" accent3="accent3" accent4="accent4" accent5="accent5" accent6="accent6" hlink="hlink" folHlink="folHlink"/>
   <p:sldLayoutIdLst>
-    <p:sldLayoutId xmlns:r="http://schemas.openxmlformats.org/officeDocument/2006/relationships" id="2147483649" r:id="Rbdeacc1bdd774b0e"/>
+    <p:sldLayoutId xmlns:r="http://schemas.openxmlformats.org/officeDocument/2006/relationships" id="2147483649" r:id="R92c50e4c459845aa"/>
   </p:sldLayoutIdLst>
   <p:txStyles>
     <p:titleStyle>
@@ -1397,7 +1397,7 @@
           <p:cNvPr id="1" name="bg">
             <a:extLst xmlns:a="http://schemas.openxmlformats.org/drawingml/2006/main">
               <a:ext uri="{FF2B5EF4-FFF2-40B4-BE49-F238E27FC236}">
-                <a16:creationId xmlns:a16="http://schemas.microsoft.com/office/drawing/2014/main" id="{139CA074-9B7C-41EB-8EA8-5A1E7454DBCE}"/>
+                <a16:creationId xmlns:a16="http://schemas.microsoft.com/office/drawing/2014/main" id="{5AD9DF38-543F-4263-96A9-E864BB61EDFC}"/>
               </a:ext>
             </a:extLst>
           </p:cNvPr>
@@ -1430,7 +1430,7 @@
           <p:cNvPr id="2" name="pill">
             <a:extLst xmlns:a="http://schemas.openxmlformats.org/drawingml/2006/main">
               <a:ext uri="{FF2B5EF4-FFF2-40B4-BE49-F238E27FC236}">
-                <a16:creationId xmlns:a16="http://schemas.microsoft.com/office/drawing/2014/main" id="{45CB9BDC-2B17-4407-9609-91EDEC316472}"/>
+                <a16:creationId xmlns:a16="http://schemas.microsoft.com/office/drawing/2014/main" id="{B58D37E4-30D9-40A4-9B2F-99D90859C505}"/>
               </a:ext>
             </a:extLst>
           </p:cNvPr>
@@ -1465,7 +1465,7 @@
           <p:cNvPr id="3" name="">
             <a:extLst xmlns:a="http://schemas.openxmlformats.org/drawingml/2006/main">
               <a:ext uri="{FF2B5EF4-FFF2-40B4-BE49-F238E27FC236}">
-                <a16:creationId xmlns:a16="http://schemas.microsoft.com/office/drawing/2014/main" id="{E25C2D2F-33B7-4CD4-AAFC-61FE1FF25C6D}"/>
+                <a16:creationId xmlns:a16="http://schemas.microsoft.com/office/drawing/2014/main" id="{5C052E44-87B0-42FC-9883-931DA6554715}"/>
               </a:ext>
             </a:extLst>
           </p:cNvPr>
@@ -1510,7 +1510,7 @@
           <p:cNvPr id="4" name="pill">
             <a:extLst xmlns:a="http://schemas.openxmlformats.org/drawingml/2006/main">
               <a:ext uri="{FF2B5EF4-FFF2-40B4-BE49-F238E27FC236}">
-                <a16:creationId xmlns:a16="http://schemas.microsoft.com/office/drawing/2014/main" id="{1B92F074-434C-47EB-8DE7-6126373DA0EF}"/>
+                <a16:creationId xmlns:a16="http://schemas.microsoft.com/office/drawing/2014/main" id="{8F00DFC3-5248-490F-B409-04690E81BDBE}"/>
               </a:ext>
             </a:extLst>
           </p:cNvPr>
@@ -1545,7 +1545,7 @@
           <p:cNvPr id="5" name="">
             <a:extLst xmlns:a="http://schemas.openxmlformats.org/drawingml/2006/main">
               <a:ext uri="{FF2B5EF4-FFF2-40B4-BE49-F238E27FC236}">
-                <a16:creationId xmlns:a16="http://schemas.microsoft.com/office/drawing/2014/main" id="{ADD1BE9C-E4D0-476A-A7FD-3A376601CF4A}"/>
+                <a16:creationId xmlns:a16="http://schemas.microsoft.com/office/drawing/2014/main" id="{D3662D79-F862-4CDF-9C5E-E6A3050748CD}"/>
               </a:ext>
             </a:extLst>
           </p:cNvPr>
@@ -1590,7 +1590,7 @@
           <p:cNvPr id="6" name="cover-brand">
             <a:extLst xmlns:a="http://schemas.openxmlformats.org/drawingml/2006/main">
               <a:ext uri="{FF2B5EF4-FFF2-40B4-BE49-F238E27FC236}">
-                <a16:creationId xmlns:a16="http://schemas.microsoft.com/office/drawing/2014/main" id="{313D0675-1B37-48A4-83BB-4372E6CB1227}"/>
+                <a16:creationId xmlns:a16="http://schemas.microsoft.com/office/drawing/2014/main" id="{9888ED1F-E962-43BE-A75E-665675C0A33A}"/>
               </a:ext>
             </a:extLst>
           </p:cNvPr>
@@ -1635,7 +1635,7 @@
           <p:cNvPr id="7" name="cover-title">
             <a:extLst xmlns:a="http://schemas.openxmlformats.org/drawingml/2006/main">
               <a:ext uri="{FF2B5EF4-FFF2-40B4-BE49-F238E27FC236}">
-                <a16:creationId xmlns:a16="http://schemas.microsoft.com/office/drawing/2014/main" id="{F8294FBE-9D54-40AA-AF60-FDE66A79CCAD}"/>
+                <a16:creationId xmlns:a16="http://schemas.microsoft.com/office/drawing/2014/main" id="{B7A9ACBC-2EC2-4E1F-8138-222A718A3283}"/>
               </a:ext>
             </a:extLst>
           </p:cNvPr>
@@ -1680,7 +1680,7 @@
           <p:cNvPr id="8" name="">
             <a:extLst xmlns:a="http://schemas.openxmlformats.org/drawingml/2006/main">
               <a:ext uri="{FF2B5EF4-FFF2-40B4-BE49-F238E27FC236}">
-                <a16:creationId xmlns:a16="http://schemas.microsoft.com/office/drawing/2014/main" id="{3FBE83D8-A9A5-456A-BC25-DC7A8D605ACA}"/>
+                <a16:creationId xmlns:a16="http://schemas.microsoft.com/office/drawing/2014/main" id="{EAE5C7BA-117F-4667-AE38-AEF05026222A}"/>
               </a:ext>
             </a:extLst>
           </p:cNvPr>
@@ -1725,7 +1725,7 @@
           <p:cNvPr id="9" name="cover-screenshot-mask">
             <a:extLst xmlns:a="http://schemas.openxmlformats.org/drawingml/2006/main">
               <a:ext uri="{FF2B5EF4-FFF2-40B4-BE49-F238E27FC236}">
-                <a16:creationId xmlns:a16="http://schemas.microsoft.com/office/drawing/2014/main" id="{E4692163-2E41-4F34-B5B7-4DD7708AFD84}"/>
+                <a16:creationId xmlns:a16="http://schemas.microsoft.com/office/drawing/2014/main" id="{8ECD5B8A-D2CC-4BD2-8F38-EA99E848EF3B}"/>
               </a:ext>
             </a:extLst>
           </p:cNvPr>
@@ -1764,7 +1764,7 @@
           <p:nvPr/>
         </p:nvPicPr>
         <p:blipFill>
-          <a:blip xmlns:r="http://schemas.openxmlformats.org/officeDocument/2006/relationships" xmlns:a="http://schemas.openxmlformats.org/drawingml/2006/main" r:embed="R8f943b52eae5495f"/>
+          <a:blip xmlns:r="http://schemas.openxmlformats.org/officeDocument/2006/relationships" xmlns:a="http://schemas.openxmlformats.org/drawingml/2006/main" r:embed="R3d7cfe5d49204aa2"/>
           <a:srcRect xmlns:a="http://schemas.openxmlformats.org/drawingml/2006/main" l="0" t="29527" r="0" b="29527"/>
           <a:stretch xmlns:a="http://schemas.openxmlformats.org/drawingml/2006/main">
             <a:fillRect l="0" t="0" r="0" b="0"/>
@@ -1783,7 +1783,7 @@
     </p:spTree>
     <p:extLst>
       <p:ext uri="{BB962C8B-B14F-4D97-AF65-F5344CB8AC3E}">
-        <p14:creationId xmlns:p14="http://schemas.microsoft.com/office/powerpoint/2010/main" val="342475294"/>
+        <p14:creationId xmlns:p14="http://schemas.microsoft.com/office/powerpoint/2010/main" val="850229000"/>
       </p:ext>
     </p:extLst>
   </p:cSld>
@@ -1814,7 +1814,7 @@
           <p:cNvPr id="1" name="bg">
             <a:extLst xmlns:a="http://schemas.openxmlformats.org/drawingml/2006/main">
               <a:ext uri="{FF2B5EF4-FFF2-40B4-BE49-F238E27FC236}">
-                <a16:creationId xmlns:a16="http://schemas.microsoft.com/office/drawing/2014/main" id="{50908FCD-774E-4D0B-9B14-C1A9DB676E21}"/>
+                <a16:creationId xmlns:a16="http://schemas.microsoft.com/office/drawing/2014/main" id="{64A6A0C7-3C76-4F96-8C4A-F5829C3EE4A8}"/>
               </a:ext>
             </a:extLst>
           </p:cNvPr>
@@ -1847,7 +1847,7 @@
           <p:cNvPr id="2" name="kicker">
             <a:extLst xmlns:a="http://schemas.openxmlformats.org/drawingml/2006/main">
               <a:ext uri="{FF2B5EF4-FFF2-40B4-BE49-F238E27FC236}">
-                <a16:creationId xmlns:a16="http://schemas.microsoft.com/office/drawing/2014/main" id="{1917A4BA-6D5E-44BA-BC90-B22E5F8DAEB7}"/>
+                <a16:creationId xmlns:a16="http://schemas.microsoft.com/office/drawing/2014/main" id="{26029C58-88CE-4ACE-AC49-5EF90FA40B2B}"/>
               </a:ext>
             </a:extLst>
           </p:cNvPr>
@@ -1892,7 +1892,7 @@
           <p:cNvPr id="3" name="slide-title">
             <a:extLst xmlns:a="http://schemas.openxmlformats.org/drawingml/2006/main">
               <a:ext uri="{FF2B5EF4-FFF2-40B4-BE49-F238E27FC236}">
-                <a16:creationId xmlns:a16="http://schemas.microsoft.com/office/drawing/2014/main" id="{6854D4F3-A922-4545-AAA1-E45D1957E3E9}"/>
+                <a16:creationId xmlns:a16="http://schemas.microsoft.com/office/drawing/2014/main" id="{FC0B86D4-7B06-4052-8456-72D76B179495}"/>
               </a:ext>
             </a:extLst>
           </p:cNvPr>
@@ -1937,7 +1937,7 @@
           <p:cNvPr id="4" name="slide-title">
             <a:extLst xmlns:a="http://schemas.openxmlformats.org/drawingml/2006/main">
               <a:ext uri="{FF2B5EF4-FFF2-40B4-BE49-F238E27FC236}">
-                <a16:creationId xmlns:a16="http://schemas.microsoft.com/office/drawing/2014/main" id="{77B29A00-2F10-49F7-B5D7-2A3EBDB35B22}"/>
+                <a16:creationId xmlns:a16="http://schemas.microsoft.com/office/drawing/2014/main" id="{7064C6AB-DB70-440F-8246-6C397B60A20C}"/>
               </a:ext>
             </a:extLst>
           </p:cNvPr>
@@ -1982,7 +1982,7 @@
           <p:cNvPr id="5" name="">
             <a:extLst xmlns:a="http://schemas.openxmlformats.org/drawingml/2006/main">
               <a:ext uri="{FF2B5EF4-FFF2-40B4-BE49-F238E27FC236}">
-                <a16:creationId xmlns:a16="http://schemas.microsoft.com/office/drawing/2014/main" id="{7B34646C-E0DF-4255-A034-8E8C617EA154}"/>
+                <a16:creationId xmlns:a16="http://schemas.microsoft.com/office/drawing/2014/main" id="{0E64F84A-D0F9-4503-A9AF-04571AC92380}"/>
               </a:ext>
             </a:extLst>
           </p:cNvPr>
@@ -2027,7 +2027,7 @@
           <p:cNvPr id="6" name="pill">
             <a:extLst xmlns:a="http://schemas.openxmlformats.org/drawingml/2006/main">
               <a:ext uri="{FF2B5EF4-FFF2-40B4-BE49-F238E27FC236}">
-                <a16:creationId xmlns:a16="http://schemas.microsoft.com/office/drawing/2014/main" id="{1383092C-60EF-48BD-AFBA-7D19DE16487E}"/>
+                <a16:creationId xmlns:a16="http://schemas.microsoft.com/office/drawing/2014/main" id="{AC7939DD-A6B3-48B1-AF07-24AA26BFA819}"/>
               </a:ext>
             </a:extLst>
           </p:cNvPr>
@@ -2062,7 +2062,7 @@
           <p:cNvPr id="7" name="">
             <a:extLst xmlns:a="http://schemas.openxmlformats.org/drawingml/2006/main">
               <a:ext uri="{FF2B5EF4-FFF2-40B4-BE49-F238E27FC236}">
-                <a16:creationId xmlns:a16="http://schemas.microsoft.com/office/drawing/2014/main" id="{EC8EB915-7B4C-4023-B866-41EAAF2F5424}"/>
+                <a16:creationId xmlns:a16="http://schemas.microsoft.com/office/drawing/2014/main" id="{3DA17AB2-2480-4D7A-A77A-60979577C274}"/>
               </a:ext>
             </a:extLst>
           </p:cNvPr>
@@ -2107,7 +2107,7 @@
           <p:cNvPr id="8" name="pill">
             <a:extLst xmlns:a="http://schemas.openxmlformats.org/drawingml/2006/main">
               <a:ext uri="{FF2B5EF4-FFF2-40B4-BE49-F238E27FC236}">
-                <a16:creationId xmlns:a16="http://schemas.microsoft.com/office/drawing/2014/main" id="{4FE0E1D3-73CD-4824-8501-9D199C5E69CE}"/>
+                <a16:creationId xmlns:a16="http://schemas.microsoft.com/office/drawing/2014/main" id="{B76E435C-43ED-4B6D-B6BB-348E34E01151}"/>
               </a:ext>
             </a:extLst>
           </p:cNvPr>
@@ -2142,7 +2142,7 @@
           <p:cNvPr id="9" name="">
             <a:extLst xmlns:a="http://schemas.openxmlformats.org/drawingml/2006/main">
               <a:ext uri="{FF2B5EF4-FFF2-40B4-BE49-F238E27FC236}">
-                <a16:creationId xmlns:a16="http://schemas.microsoft.com/office/drawing/2014/main" id="{871ED05D-10CF-4862-9338-1F79281354CD}"/>
+                <a16:creationId xmlns:a16="http://schemas.microsoft.com/office/drawing/2014/main" id="{72F51996-D6A9-4C9D-A84C-7FCC23F402FC}"/>
               </a:ext>
             </a:extLst>
           </p:cNvPr>
@@ -2187,7 +2187,7 @@
           <p:cNvPr id="10" name="pill">
             <a:extLst xmlns:a="http://schemas.openxmlformats.org/drawingml/2006/main">
               <a:ext uri="{FF2B5EF4-FFF2-40B4-BE49-F238E27FC236}">
-                <a16:creationId xmlns:a16="http://schemas.microsoft.com/office/drawing/2014/main" id="{55486B7B-092B-4596-B843-BD28B680FA54}"/>
+                <a16:creationId xmlns:a16="http://schemas.microsoft.com/office/drawing/2014/main" id="{41D8AB45-6588-4DDF-BB2C-683033CC1AEC}"/>
               </a:ext>
             </a:extLst>
           </p:cNvPr>
@@ -2222,7 +2222,7 @@
           <p:cNvPr id="11" name="">
             <a:extLst xmlns:a="http://schemas.openxmlformats.org/drawingml/2006/main">
               <a:ext uri="{FF2B5EF4-FFF2-40B4-BE49-F238E27FC236}">
-                <a16:creationId xmlns:a16="http://schemas.microsoft.com/office/drawing/2014/main" id="{8D5F3B46-D014-4054-AA47-148F5D52BC40}"/>
+                <a16:creationId xmlns:a16="http://schemas.microsoft.com/office/drawing/2014/main" id="{90CF64D0-BEB5-4FCD-8FD1-F7AA43F75126}"/>
               </a:ext>
             </a:extLst>
           </p:cNvPr>
@@ -2267,23 +2267,23 @@
           <p:cNvPr id="12" name="screenshot-frame">
             <a:extLst xmlns:a="http://schemas.openxmlformats.org/drawingml/2006/main">
               <a:ext uri="{FF2B5EF4-FFF2-40B4-BE49-F238E27FC236}">
-                <a16:creationId xmlns:a16="http://schemas.microsoft.com/office/drawing/2014/main" id="{25C72B48-F3AB-4572-B85B-8D9A5EEBCF0D}"/>
-              </a:ext>
-            </a:extLst>
-          </p:cNvPr>
-          <p:cNvSpPr>
-            <a:spLocks xmlns:a="http://schemas.openxmlformats.org/drawingml/2006/main" noGrp="1"/>
-          </p:cNvSpPr>
-          <p:nvPr/>
-        </p:nvSpPr>
-        <p:spPr>
-          <a:xfrm xmlns:a="http://schemas.openxmlformats.org/drawingml/2006/main">
-            <a:off x="9991725" y="1524000"/>
-            <a:ext cx="3143250" cy="7239000"/>
+                <a16:creationId xmlns:a16="http://schemas.microsoft.com/office/drawing/2014/main" id="{273D8721-5BF4-4B1D-91FC-665926947621}"/>
+              </a:ext>
+            </a:extLst>
+          </p:cNvPr>
+          <p:cNvSpPr>
+            <a:spLocks xmlns:a="http://schemas.openxmlformats.org/drawingml/2006/main" noGrp="1"/>
+          </p:cNvSpPr>
+          <p:nvPr/>
+        </p:nvSpPr>
+        <p:spPr>
+          <a:xfrm xmlns:a="http://schemas.openxmlformats.org/drawingml/2006/main">
+            <a:off x="11058525" y="1238250"/>
+            <a:ext cx="4381500" cy="7810500"/>
           </a:xfrm>
           <a:prstGeom xmlns:a="http://schemas.openxmlformats.org/drawingml/2006/main" prst="roundRect">
             <a:avLst>
-              <a:gd name="adj" fmla="val 2424"/>
+              <a:gd name="adj" fmla="val 1739"/>
             </a:avLst>
           </a:prstGeom>
           <a:solidFill xmlns:a="http://schemas.openxmlformats.org/drawingml/2006/main">
@@ -2306,76 +2306,16 @@
           <p:nvPr/>
         </p:nvPicPr>
         <p:blipFill>
-          <a:blip xmlns:r="http://schemas.openxmlformats.org/officeDocument/2006/relationships" xmlns:a="http://schemas.openxmlformats.org/drawingml/2006/main" r:embed="R419f4857e08b458b"/>
-          <a:srcRect xmlns:a="http://schemas.openxmlformats.org/drawingml/2006/main" l="3016" t="0" r="3016" b="0"/>
+          <a:blip xmlns:r="http://schemas.openxmlformats.org/officeDocument/2006/relationships" xmlns:a="http://schemas.openxmlformats.org/drawingml/2006/main" r:embed="R00b1912c660941ca"/>
+          <a:srcRect xmlns:a="http://schemas.openxmlformats.org/drawingml/2006/main" l="0" t="8814" r="0" b="8814"/>
           <a:stretch xmlns:a="http://schemas.openxmlformats.org/drawingml/2006/main">
             <a:fillRect l="0" t="0" r="0" b="0"/>
           </a:stretch>
         </p:blipFill>
         <p:spPr>
           <a:xfrm xmlns:a="http://schemas.openxmlformats.org/drawingml/2006/main">
-            <a:off x="9991725" y="1524000"/>
-            <a:ext cx="3143250" cy="7239000"/>
-          </a:xfrm>
-          <a:prstGeom xmlns:a="http://schemas.openxmlformats.org/drawingml/2006/main" prst="rect">
-            <a:avLst/>
-          </a:prstGeom>
-        </p:spPr>
-      </p:pic>
-      <p:sp>
-        <p:nvSpPr>
-          <p:cNvPr id="14" name="screenshot-frame">
-            <a:extLst xmlns:a="http://schemas.openxmlformats.org/drawingml/2006/main">
-              <a:ext uri="{FF2B5EF4-FFF2-40B4-BE49-F238E27FC236}">
-                <a16:creationId xmlns:a16="http://schemas.microsoft.com/office/drawing/2014/main" id="{25F85598-2EF1-442D-822E-353E5AD54889}"/>
-              </a:ext>
-            </a:extLst>
-          </p:cNvPr>
-          <p:cNvSpPr>
-            <a:spLocks xmlns:a="http://schemas.openxmlformats.org/drawingml/2006/main" noGrp="1"/>
-          </p:cNvSpPr>
-          <p:nvPr/>
-        </p:nvSpPr>
-        <p:spPr>
-          <a:xfrm xmlns:a="http://schemas.openxmlformats.org/drawingml/2006/main">
-            <a:off x="13363575" y="1524000"/>
-            <a:ext cx="3143250" cy="7239000"/>
-          </a:xfrm>
-          <a:prstGeom xmlns:a="http://schemas.openxmlformats.org/drawingml/2006/main" prst="roundRect">
-            <a:avLst>
-              <a:gd name="adj" fmla="val 2424"/>
-            </a:avLst>
-          </a:prstGeom>
-          <a:solidFill xmlns:a="http://schemas.openxmlformats.org/drawingml/2006/main">
-            <a:srgbClr val="FFFFFF"/>
-          </a:solidFill>
-          <a:ln xmlns:a="http://schemas.openxmlformats.org/drawingml/2006/main" w="0">
-            <a:solidFill>
-              <a:srgbClr val="FFFFFF"/>
-            </a:solidFill>
-            <a:prstDash val="solid"/>
-          </a:ln>
-        </p:spPr>
-      </p:sp>
-      <p:pic>
-        <p:nvPicPr>
-          <p:cNvPr id="15" name="screenshot"/>
-          <p:cNvPicPr>
-            <a:picLocks xmlns:a="http://schemas.openxmlformats.org/drawingml/2006/main" noChangeAspect="1"/>
-          </p:cNvPicPr>
-          <p:nvPr/>
-        </p:nvPicPr>
-        <p:blipFill>
-          <a:blip xmlns:r="http://schemas.openxmlformats.org/officeDocument/2006/relationships" xmlns:a="http://schemas.openxmlformats.org/drawingml/2006/main" r:embed="Rf7d10a8c989d441b"/>
-          <a:srcRect xmlns:a="http://schemas.openxmlformats.org/drawingml/2006/main" l="3016" t="0" r="3016" b="0"/>
-          <a:stretch xmlns:a="http://schemas.openxmlformats.org/drawingml/2006/main">
-            <a:fillRect l="0" t="0" r="0" b="0"/>
-          </a:stretch>
-        </p:blipFill>
-        <p:spPr>
-          <a:xfrm xmlns:a="http://schemas.openxmlformats.org/drawingml/2006/main">
-            <a:off x="13363575" y="1524000"/>
-            <a:ext cx="3143250" cy="7239000"/>
+            <a:off x="11058525" y="1238250"/>
+            <a:ext cx="4381500" cy="7810500"/>
           </a:xfrm>
           <a:prstGeom xmlns:a="http://schemas.openxmlformats.org/drawingml/2006/main" prst="rect">
             <a:avLst/>
@@ -2385,7 +2325,7 @@
     </p:spTree>
     <p:extLst>
       <p:ext uri="{BB962C8B-B14F-4D97-AF65-F5344CB8AC3E}">
-        <p14:creationId xmlns:p14="http://schemas.microsoft.com/office/powerpoint/2010/main" val="2044323175"/>
+        <p14:creationId xmlns:p14="http://schemas.microsoft.com/office/powerpoint/2010/main" val="1378612859"/>
       </p:ext>
     </p:extLst>
   </p:cSld>
@@ -2416,7 +2356,7 @@
           <p:cNvPr id="1" name="bg">
             <a:extLst xmlns:a="http://schemas.openxmlformats.org/drawingml/2006/main">
               <a:ext uri="{FF2B5EF4-FFF2-40B4-BE49-F238E27FC236}">
-                <a16:creationId xmlns:a16="http://schemas.microsoft.com/office/drawing/2014/main" id="{2CD9FCD3-2856-4336-9A3C-8502B1AF0DD5}"/>
+                <a16:creationId xmlns:a16="http://schemas.microsoft.com/office/drawing/2014/main" id="{193D6E4F-7E11-4535-B262-FA865E9735DD}"/>
               </a:ext>
             </a:extLst>
           </p:cNvPr>
@@ -2449,7 +2389,7 @@
           <p:cNvPr id="2" name="kicker">
             <a:extLst xmlns:a="http://schemas.openxmlformats.org/drawingml/2006/main">
               <a:ext uri="{FF2B5EF4-FFF2-40B4-BE49-F238E27FC236}">
-                <a16:creationId xmlns:a16="http://schemas.microsoft.com/office/drawing/2014/main" id="{C756D0B1-B13D-4427-9882-F267D25CA614}"/>
+                <a16:creationId xmlns:a16="http://schemas.microsoft.com/office/drawing/2014/main" id="{30673FCA-353D-4108-8773-241BBE66F6CF}"/>
               </a:ext>
             </a:extLst>
           </p:cNvPr>
@@ -2494,7 +2434,7 @@
           <p:cNvPr id="3" name="slide-title">
             <a:extLst xmlns:a="http://schemas.openxmlformats.org/drawingml/2006/main">
               <a:ext uri="{FF2B5EF4-FFF2-40B4-BE49-F238E27FC236}">
-                <a16:creationId xmlns:a16="http://schemas.microsoft.com/office/drawing/2014/main" id="{1DEB53AA-6E63-4167-AACF-8FF2C4792F1D}"/>
+                <a16:creationId xmlns:a16="http://schemas.microsoft.com/office/drawing/2014/main" id="{7083D576-72B9-478A-8121-24D81A828F5F}"/>
               </a:ext>
             </a:extLst>
           </p:cNvPr>
@@ -2539,7 +2479,7 @@
           <p:cNvPr id="4" name="">
             <a:extLst xmlns:a="http://schemas.openxmlformats.org/drawingml/2006/main">
               <a:ext uri="{FF2B5EF4-FFF2-40B4-BE49-F238E27FC236}">
-                <a16:creationId xmlns:a16="http://schemas.microsoft.com/office/drawing/2014/main" id="{38845B60-1019-4C01-8B6F-7B8072ADD0CF}"/>
+                <a16:creationId xmlns:a16="http://schemas.microsoft.com/office/drawing/2014/main" id="{1C8FF86F-B134-4549-8F0C-B28BA7035AF5}"/>
               </a:ext>
             </a:extLst>
           </p:cNvPr>
@@ -2584,7 +2524,7 @@
           <p:cNvPr id="5" name="mark">
             <a:extLst xmlns:a="http://schemas.openxmlformats.org/drawingml/2006/main">
               <a:ext uri="{FF2B5EF4-FFF2-40B4-BE49-F238E27FC236}">
-                <a16:creationId xmlns:a16="http://schemas.microsoft.com/office/drawing/2014/main" id="{C748B47C-D95A-4EB9-82A4-CEF6107643BA}"/>
+                <a16:creationId xmlns:a16="http://schemas.microsoft.com/office/drawing/2014/main" id="{519AE1C1-2EBB-4297-9EB5-A55C7F36D282}"/>
               </a:ext>
             </a:extLst>
           </p:cNvPr>
@@ -2619,7 +2559,7 @@
           <p:cNvPr id="6" name="">
             <a:extLst xmlns:a="http://schemas.openxmlformats.org/drawingml/2006/main">
               <a:ext uri="{FF2B5EF4-FFF2-40B4-BE49-F238E27FC236}">
-                <a16:creationId xmlns:a16="http://schemas.microsoft.com/office/drawing/2014/main" id="{12949818-DCBF-450F-A3EF-7EC4F0AA6460}"/>
+                <a16:creationId xmlns:a16="http://schemas.microsoft.com/office/drawing/2014/main" id="{6B4548C2-F4F1-466D-AB9D-C728BD007590}"/>
               </a:ext>
             </a:extLst>
           </p:cNvPr>
@@ -2664,7 +2604,7 @@
           <p:cNvPr id="7" name="">
             <a:extLst xmlns:a="http://schemas.openxmlformats.org/drawingml/2006/main">
               <a:ext uri="{FF2B5EF4-FFF2-40B4-BE49-F238E27FC236}">
-                <a16:creationId xmlns:a16="http://schemas.microsoft.com/office/drawing/2014/main" id="{255E81D5-7584-4F26-B1CE-6A3CDE02968F}"/>
+                <a16:creationId xmlns:a16="http://schemas.microsoft.com/office/drawing/2014/main" id="{A65376ED-7F39-48ED-962D-0B80980C0831}"/>
               </a:ext>
             </a:extLst>
           </p:cNvPr>
@@ -2709,7 +2649,7 @@
           <p:cNvPr id="8" name="">
             <a:extLst xmlns:a="http://schemas.openxmlformats.org/drawingml/2006/main">
               <a:ext uri="{FF2B5EF4-FFF2-40B4-BE49-F238E27FC236}">
-                <a16:creationId xmlns:a16="http://schemas.microsoft.com/office/drawing/2014/main" id="{63CC30FA-E995-4CA7-8ADE-80F2D1870439}"/>
+                <a16:creationId xmlns:a16="http://schemas.microsoft.com/office/drawing/2014/main" id="{192B0A2D-6F16-43DE-A2D3-2EC02C0E11E7}"/>
               </a:ext>
             </a:extLst>
           </p:cNvPr>
@@ -2754,7 +2694,7 @@
           <p:cNvPr id="9" name="mark">
             <a:extLst xmlns:a="http://schemas.openxmlformats.org/drawingml/2006/main">
               <a:ext uri="{FF2B5EF4-FFF2-40B4-BE49-F238E27FC236}">
-                <a16:creationId xmlns:a16="http://schemas.microsoft.com/office/drawing/2014/main" id="{2B6E9F67-8010-44F1-A570-BDE3E069F756}"/>
+                <a16:creationId xmlns:a16="http://schemas.microsoft.com/office/drawing/2014/main" id="{D411D4B2-BEA8-4D17-9908-80BB0C48867D}"/>
               </a:ext>
             </a:extLst>
           </p:cNvPr>
@@ -2789,7 +2729,7 @@
           <p:cNvPr id="10" name="">
             <a:extLst xmlns:a="http://schemas.openxmlformats.org/drawingml/2006/main">
               <a:ext uri="{FF2B5EF4-FFF2-40B4-BE49-F238E27FC236}">
-                <a16:creationId xmlns:a16="http://schemas.microsoft.com/office/drawing/2014/main" id="{8060659E-0689-47D1-A2E8-008B161B6B47}"/>
+                <a16:creationId xmlns:a16="http://schemas.microsoft.com/office/drawing/2014/main" id="{9AB5EEBF-960E-42E3-9AE2-89DD24F37F89}"/>
               </a:ext>
             </a:extLst>
           </p:cNvPr>
@@ -2834,7 +2774,7 @@
           <p:cNvPr id="11" name="">
             <a:extLst xmlns:a="http://schemas.openxmlformats.org/drawingml/2006/main">
               <a:ext uri="{FF2B5EF4-FFF2-40B4-BE49-F238E27FC236}">
-                <a16:creationId xmlns:a16="http://schemas.microsoft.com/office/drawing/2014/main" id="{DBDF257A-9792-46F7-948E-A777F0E9C5A0}"/>
+                <a16:creationId xmlns:a16="http://schemas.microsoft.com/office/drawing/2014/main" id="{B6DB6AB4-DD7F-4C4B-858E-DF189D3377AF}"/>
               </a:ext>
             </a:extLst>
           </p:cNvPr>
@@ -2879,7 +2819,7 @@
           <p:cNvPr id="12" name="">
             <a:extLst xmlns:a="http://schemas.openxmlformats.org/drawingml/2006/main">
               <a:ext uri="{FF2B5EF4-FFF2-40B4-BE49-F238E27FC236}">
-                <a16:creationId xmlns:a16="http://schemas.microsoft.com/office/drawing/2014/main" id="{B0DF7A3F-2B1B-49C0-841C-CCEEC93B06B6}"/>
+                <a16:creationId xmlns:a16="http://schemas.microsoft.com/office/drawing/2014/main" id="{1DCC2440-B8CF-40E1-A329-637F7E27EC7D}"/>
               </a:ext>
             </a:extLst>
           </p:cNvPr>
@@ -2924,7 +2864,7 @@
           <p:cNvPr id="13" name="mark">
             <a:extLst xmlns:a="http://schemas.openxmlformats.org/drawingml/2006/main">
               <a:ext uri="{FF2B5EF4-FFF2-40B4-BE49-F238E27FC236}">
-                <a16:creationId xmlns:a16="http://schemas.microsoft.com/office/drawing/2014/main" id="{7206D2D6-E50B-4C2F-8212-D62486D2C86C}"/>
+                <a16:creationId xmlns:a16="http://schemas.microsoft.com/office/drawing/2014/main" id="{3153B1EC-5EDE-4765-B9AF-51DE1F65AB1A}"/>
               </a:ext>
             </a:extLst>
           </p:cNvPr>
@@ -2959,7 +2899,7 @@
           <p:cNvPr id="14" name="">
             <a:extLst xmlns:a="http://schemas.openxmlformats.org/drawingml/2006/main">
               <a:ext uri="{FF2B5EF4-FFF2-40B4-BE49-F238E27FC236}">
-                <a16:creationId xmlns:a16="http://schemas.microsoft.com/office/drawing/2014/main" id="{8B46A8DE-A3EA-48B9-9298-CF2BF0810017}"/>
+                <a16:creationId xmlns:a16="http://schemas.microsoft.com/office/drawing/2014/main" id="{FCFFFC5D-9FA3-4585-8577-46C51C416A8B}"/>
               </a:ext>
             </a:extLst>
           </p:cNvPr>
@@ -3004,7 +2944,7 @@
           <p:cNvPr id="15" name="">
             <a:extLst xmlns:a="http://schemas.openxmlformats.org/drawingml/2006/main">
               <a:ext uri="{FF2B5EF4-FFF2-40B4-BE49-F238E27FC236}">
-                <a16:creationId xmlns:a16="http://schemas.microsoft.com/office/drawing/2014/main" id="{BDE242D9-30C9-4DD4-8994-2A92B9D1CCE6}"/>
+                <a16:creationId xmlns:a16="http://schemas.microsoft.com/office/drawing/2014/main" id="{479EFB2B-9499-4CAA-9BF4-57387AB405A4}"/>
               </a:ext>
             </a:extLst>
           </p:cNvPr>
@@ -3049,7 +2989,7 @@
           <p:cNvPr id="16" name="">
             <a:extLst xmlns:a="http://schemas.openxmlformats.org/drawingml/2006/main">
               <a:ext uri="{FF2B5EF4-FFF2-40B4-BE49-F238E27FC236}">
-                <a16:creationId xmlns:a16="http://schemas.microsoft.com/office/drawing/2014/main" id="{AA02E875-18B6-4B83-BB07-A5BEFF266C01}"/>
+                <a16:creationId xmlns:a16="http://schemas.microsoft.com/office/drawing/2014/main" id="{93232D27-D622-4A63-887A-C833DD2693C4}"/>
               </a:ext>
             </a:extLst>
           </p:cNvPr>
@@ -3094,7 +3034,7 @@
           <p:cNvPr id="17" name="mark">
             <a:extLst xmlns:a="http://schemas.openxmlformats.org/drawingml/2006/main">
               <a:ext uri="{FF2B5EF4-FFF2-40B4-BE49-F238E27FC236}">
-                <a16:creationId xmlns:a16="http://schemas.microsoft.com/office/drawing/2014/main" id="{0743CC43-9BD8-42A7-BEE0-A77074D404BA}"/>
+                <a16:creationId xmlns:a16="http://schemas.microsoft.com/office/drawing/2014/main" id="{4396C7D0-683C-43E2-B948-69BEDAF0E96A}"/>
               </a:ext>
             </a:extLst>
           </p:cNvPr>
@@ -3129,7 +3069,7 @@
           <p:cNvPr id="18" name="">
             <a:extLst xmlns:a="http://schemas.openxmlformats.org/drawingml/2006/main">
               <a:ext uri="{FF2B5EF4-FFF2-40B4-BE49-F238E27FC236}">
-                <a16:creationId xmlns:a16="http://schemas.microsoft.com/office/drawing/2014/main" id="{AEE0E782-BD4F-4201-ACB2-CF865B54BE99}"/>
+                <a16:creationId xmlns:a16="http://schemas.microsoft.com/office/drawing/2014/main" id="{ED9DB9F1-B8D3-43BA-88F6-CF46CD6F10F8}"/>
               </a:ext>
             </a:extLst>
           </p:cNvPr>
@@ -3174,7 +3114,7 @@
           <p:cNvPr id="19" name="">
             <a:extLst xmlns:a="http://schemas.openxmlformats.org/drawingml/2006/main">
               <a:ext uri="{FF2B5EF4-FFF2-40B4-BE49-F238E27FC236}">
-                <a16:creationId xmlns:a16="http://schemas.microsoft.com/office/drawing/2014/main" id="{AE2A3436-D715-4416-BB88-9C7F406497A2}"/>
+                <a16:creationId xmlns:a16="http://schemas.microsoft.com/office/drawing/2014/main" id="{D447BAD9-AB3E-407C-807E-FDE4A94E4A8D}"/>
               </a:ext>
             </a:extLst>
           </p:cNvPr>
@@ -3219,7 +3159,7 @@
           <p:cNvPr id="20" name="">
             <a:extLst xmlns:a="http://schemas.openxmlformats.org/drawingml/2006/main">
               <a:ext uri="{FF2B5EF4-FFF2-40B4-BE49-F238E27FC236}">
-                <a16:creationId xmlns:a16="http://schemas.microsoft.com/office/drawing/2014/main" id="{BA39D9D7-6384-4669-9F96-864E6507B81D}"/>
+                <a16:creationId xmlns:a16="http://schemas.microsoft.com/office/drawing/2014/main" id="{B12D3FC7-9B6E-4DC8-8049-C4FC50C87D00}"/>
               </a:ext>
             </a:extLst>
           </p:cNvPr>
@@ -3264,7 +3204,7 @@
           <p:cNvPr id="21" name="source">
             <a:extLst xmlns:a="http://schemas.openxmlformats.org/drawingml/2006/main">
               <a:ext uri="{FF2B5EF4-FFF2-40B4-BE49-F238E27FC236}">
-                <a16:creationId xmlns:a16="http://schemas.microsoft.com/office/drawing/2014/main" id="{3580EAD2-55F2-422A-9392-36C07E7B208A}"/>
+                <a16:creationId xmlns:a16="http://schemas.microsoft.com/office/drawing/2014/main" id="{E25F211F-9509-412E-9353-3BE684C51286}"/>
               </a:ext>
             </a:extLst>
           </p:cNvPr>
@@ -3307,7 +3247,7 @@
     </p:spTree>
     <p:extLst>
       <p:ext uri="{BB962C8B-B14F-4D97-AF65-F5344CB8AC3E}">
-        <p14:creationId xmlns:p14="http://schemas.microsoft.com/office/powerpoint/2010/main" val="1362975608"/>
+        <p14:creationId xmlns:p14="http://schemas.microsoft.com/office/powerpoint/2010/main" val="185663447"/>
       </p:ext>
     </p:extLst>
   </p:cSld>
@@ -3338,7 +3278,7 @@
           <p:cNvPr id="1" name="bg">
             <a:extLst xmlns:a="http://schemas.openxmlformats.org/drawingml/2006/main">
               <a:ext uri="{FF2B5EF4-FFF2-40B4-BE49-F238E27FC236}">
-                <a16:creationId xmlns:a16="http://schemas.microsoft.com/office/drawing/2014/main" id="{A068C6B1-1C54-4DDF-98DF-9B0405F2317B}"/>
+                <a16:creationId xmlns:a16="http://schemas.microsoft.com/office/drawing/2014/main" id="{11CFB002-6B6A-45B8-AC55-BACD27C82D9B}"/>
               </a:ext>
             </a:extLst>
           </p:cNvPr>
@@ -3371,7 +3311,7 @@
           <p:cNvPr id="2" name="kicker">
             <a:extLst xmlns:a="http://schemas.openxmlformats.org/drawingml/2006/main">
               <a:ext uri="{FF2B5EF4-FFF2-40B4-BE49-F238E27FC236}">
-                <a16:creationId xmlns:a16="http://schemas.microsoft.com/office/drawing/2014/main" id="{D39C8E38-AC1E-435A-B3BD-44769DE13526}"/>
+                <a16:creationId xmlns:a16="http://schemas.microsoft.com/office/drawing/2014/main" id="{F690BD8A-0AA8-449C-8BBC-51811EAF66C6}"/>
               </a:ext>
             </a:extLst>
           </p:cNvPr>
@@ -3416,7 +3356,7 @@
           <p:cNvPr id="3" name="slide-title">
             <a:extLst xmlns:a="http://schemas.openxmlformats.org/drawingml/2006/main">
               <a:ext uri="{FF2B5EF4-FFF2-40B4-BE49-F238E27FC236}">
-                <a16:creationId xmlns:a16="http://schemas.microsoft.com/office/drawing/2014/main" id="{E852D094-0783-4D52-9E14-E75899BDE17A}"/>
+                <a16:creationId xmlns:a16="http://schemas.microsoft.com/office/drawing/2014/main" id="{EB3D3120-3024-4E19-BEF9-11FBFB899913}"/>
               </a:ext>
             </a:extLst>
           </p:cNvPr>
@@ -3461,7 +3401,7 @@
           <p:cNvPr id="4" name="">
             <a:extLst xmlns:a="http://schemas.openxmlformats.org/drawingml/2006/main">
               <a:ext uri="{FF2B5EF4-FFF2-40B4-BE49-F238E27FC236}">
-                <a16:creationId xmlns:a16="http://schemas.microsoft.com/office/drawing/2014/main" id="{2839BBC9-B4F0-41A2-8A4E-DCB869206F71}"/>
+                <a16:creationId xmlns:a16="http://schemas.microsoft.com/office/drawing/2014/main" id="{CE2692A3-0F89-489E-B71F-F0322BF71AD1}"/>
               </a:ext>
             </a:extLst>
           </p:cNvPr>
@@ -3506,7 +3446,7 @@
           <p:cNvPr id="5" name="pill">
             <a:extLst xmlns:a="http://schemas.openxmlformats.org/drawingml/2006/main">
               <a:ext uri="{FF2B5EF4-FFF2-40B4-BE49-F238E27FC236}">
-                <a16:creationId xmlns:a16="http://schemas.microsoft.com/office/drawing/2014/main" id="{D239B90A-EE80-428C-A62D-DD468BA03701}"/>
+                <a16:creationId xmlns:a16="http://schemas.microsoft.com/office/drawing/2014/main" id="{4357CACE-2F46-4426-92BC-CB41F60FE955}"/>
               </a:ext>
             </a:extLst>
           </p:cNvPr>
@@ -3541,7 +3481,7 @@
           <p:cNvPr id="6" name="">
             <a:extLst xmlns:a="http://schemas.openxmlformats.org/drawingml/2006/main">
               <a:ext uri="{FF2B5EF4-FFF2-40B4-BE49-F238E27FC236}">
-                <a16:creationId xmlns:a16="http://schemas.microsoft.com/office/drawing/2014/main" id="{0501E7D7-5F9E-4DDD-AEDE-A37DA336D65E}"/>
+                <a16:creationId xmlns:a16="http://schemas.microsoft.com/office/drawing/2014/main" id="{AD0D4D0F-222F-4633-9F17-5E88C17C6BAE}"/>
               </a:ext>
             </a:extLst>
           </p:cNvPr>
@@ -3586,7 +3526,7 @@
           <p:cNvPr id="7" name="pill">
             <a:extLst xmlns:a="http://schemas.openxmlformats.org/drawingml/2006/main">
               <a:ext uri="{FF2B5EF4-FFF2-40B4-BE49-F238E27FC236}">
-                <a16:creationId xmlns:a16="http://schemas.microsoft.com/office/drawing/2014/main" id="{1F2C682E-75AC-4E47-87C6-2B1E85F6AC92}"/>
+                <a16:creationId xmlns:a16="http://schemas.microsoft.com/office/drawing/2014/main" id="{D6FDC5DB-E5BC-4483-984C-18C1F85152AB}"/>
               </a:ext>
             </a:extLst>
           </p:cNvPr>
@@ -3621,7 +3561,7 @@
           <p:cNvPr id="8" name="">
             <a:extLst xmlns:a="http://schemas.openxmlformats.org/drawingml/2006/main">
               <a:ext uri="{FF2B5EF4-FFF2-40B4-BE49-F238E27FC236}">
-                <a16:creationId xmlns:a16="http://schemas.microsoft.com/office/drawing/2014/main" id="{4FBE425F-CBE9-4358-8F32-06601E28C30E}"/>
+                <a16:creationId xmlns:a16="http://schemas.microsoft.com/office/drawing/2014/main" id="{A77632CF-3948-4FAD-B222-8083D587C5A2}"/>
               </a:ext>
             </a:extLst>
           </p:cNvPr>
@@ -3666,7 +3606,7 @@
           <p:cNvPr id="9" name="">
             <a:extLst xmlns:a="http://schemas.openxmlformats.org/drawingml/2006/main">
               <a:ext uri="{FF2B5EF4-FFF2-40B4-BE49-F238E27FC236}">
-                <a16:creationId xmlns:a16="http://schemas.microsoft.com/office/drawing/2014/main" id="{B9FC68E2-9689-421A-8CAD-CC762DF67D3B}"/>
+                <a16:creationId xmlns:a16="http://schemas.microsoft.com/office/drawing/2014/main" id="{606BC129-A5B0-430D-B8FE-856DD445280D}"/>
               </a:ext>
             </a:extLst>
           </p:cNvPr>
@@ -3705,7 +3645,7 @@
           <p:nvPr/>
         </p:nvPicPr>
         <p:blipFill>
-          <a:blip xmlns:r="http://schemas.openxmlformats.org/officeDocument/2006/relationships" xmlns:a="http://schemas.openxmlformats.org/drawingml/2006/main" r:embed="R46b121ce3b5843f1"/>
+          <a:blip xmlns:r="http://schemas.openxmlformats.org/officeDocument/2006/relationships" xmlns:a="http://schemas.openxmlformats.org/drawingml/2006/main" r:embed="Rd44eeb0c8d7a4168"/>
           <a:srcRect xmlns:a="http://schemas.openxmlformats.org/drawingml/2006/main" l="0" t="14846" r="0" b="14846"/>
           <a:stretch xmlns:a="http://schemas.openxmlformats.org/drawingml/2006/main">
             <a:fillRect l="0" t="0" r="0" b="0"/>
@@ -3724,7 +3664,7 @@
     </p:spTree>
     <p:extLst>
       <p:ext uri="{BB962C8B-B14F-4D97-AF65-F5344CB8AC3E}">
-        <p14:creationId xmlns:p14="http://schemas.microsoft.com/office/powerpoint/2010/main" val="1544337129"/>
+        <p14:creationId xmlns:p14="http://schemas.microsoft.com/office/powerpoint/2010/main" val="1503385344"/>
       </p:ext>
     </p:extLst>
   </p:cSld>
@@ -3755,7 +3695,7 @@
           <p:cNvPr id="1" name="bg">
             <a:extLst xmlns:a="http://schemas.openxmlformats.org/drawingml/2006/main">
               <a:ext uri="{FF2B5EF4-FFF2-40B4-BE49-F238E27FC236}">
-                <a16:creationId xmlns:a16="http://schemas.microsoft.com/office/drawing/2014/main" id="{17EB6F46-195F-4381-8CA4-767825FDF8C9}"/>
+                <a16:creationId xmlns:a16="http://schemas.microsoft.com/office/drawing/2014/main" id="{DB6DFE74-D235-4F2B-877F-C5FE1F8EFEA0}"/>
               </a:ext>
             </a:extLst>
           </p:cNvPr>
@@ -3788,7 +3728,7 @@
           <p:cNvPr id="2" name="kicker">
             <a:extLst xmlns:a="http://schemas.openxmlformats.org/drawingml/2006/main">
               <a:ext uri="{FF2B5EF4-FFF2-40B4-BE49-F238E27FC236}">
-                <a16:creationId xmlns:a16="http://schemas.microsoft.com/office/drawing/2014/main" id="{35A57B43-C131-4149-93BB-A6506F7B250C}"/>
+                <a16:creationId xmlns:a16="http://schemas.microsoft.com/office/drawing/2014/main" id="{EAAC12AD-CF49-4759-B81C-8FDA64B34C2E}"/>
               </a:ext>
             </a:extLst>
           </p:cNvPr>
@@ -3833,7 +3773,7 @@
           <p:cNvPr id="3" name="slide-title">
             <a:extLst xmlns:a="http://schemas.openxmlformats.org/drawingml/2006/main">
               <a:ext uri="{FF2B5EF4-FFF2-40B4-BE49-F238E27FC236}">
-                <a16:creationId xmlns:a16="http://schemas.microsoft.com/office/drawing/2014/main" id="{8C19BD27-5CEE-4253-ADBB-165C16582E3A}"/>
+                <a16:creationId xmlns:a16="http://schemas.microsoft.com/office/drawing/2014/main" id="{909F8B70-3719-4988-BFC4-E2E7A0105189}"/>
               </a:ext>
             </a:extLst>
           </p:cNvPr>
@@ -3878,7 +3818,7 @@
           <p:cNvPr id="4" name="">
             <a:extLst xmlns:a="http://schemas.openxmlformats.org/drawingml/2006/main">
               <a:ext uri="{FF2B5EF4-FFF2-40B4-BE49-F238E27FC236}">
-                <a16:creationId xmlns:a16="http://schemas.microsoft.com/office/drawing/2014/main" id="{F13A0865-EF02-463B-8769-7AD91FAEDA4D}"/>
+                <a16:creationId xmlns:a16="http://schemas.microsoft.com/office/drawing/2014/main" id="{617494E9-A5E6-425C-9E74-C6407EAB98F9}"/>
               </a:ext>
             </a:extLst>
           </p:cNvPr>
@@ -3923,7 +3863,7 @@
           <p:cNvPr id="5" name="pill">
             <a:extLst xmlns:a="http://schemas.openxmlformats.org/drawingml/2006/main">
               <a:ext uri="{FF2B5EF4-FFF2-40B4-BE49-F238E27FC236}">
-                <a16:creationId xmlns:a16="http://schemas.microsoft.com/office/drawing/2014/main" id="{430CF60B-F463-4700-A4C4-F369A1927627}"/>
+                <a16:creationId xmlns:a16="http://schemas.microsoft.com/office/drawing/2014/main" id="{9DC18620-1C6D-4822-9DA3-0603D551D3DF}"/>
               </a:ext>
             </a:extLst>
           </p:cNvPr>
@@ -3958,7 +3898,7 @@
           <p:cNvPr id="6" name="">
             <a:extLst xmlns:a="http://schemas.openxmlformats.org/drawingml/2006/main">
               <a:ext uri="{FF2B5EF4-FFF2-40B4-BE49-F238E27FC236}">
-                <a16:creationId xmlns:a16="http://schemas.microsoft.com/office/drawing/2014/main" id="{5C4C0937-1ED4-40B8-BFBD-F636EC93F159}"/>
+                <a16:creationId xmlns:a16="http://schemas.microsoft.com/office/drawing/2014/main" id="{7F0CFE39-5299-4C92-AEF2-667E9FC2EECA}"/>
               </a:ext>
             </a:extLst>
           </p:cNvPr>
@@ -4003,7 +3943,7 @@
           <p:cNvPr id="7" name="pill">
             <a:extLst xmlns:a="http://schemas.openxmlformats.org/drawingml/2006/main">
               <a:ext uri="{FF2B5EF4-FFF2-40B4-BE49-F238E27FC236}">
-                <a16:creationId xmlns:a16="http://schemas.microsoft.com/office/drawing/2014/main" id="{65FDD530-D5C7-4D32-AE84-E8798BAB43FE}"/>
+                <a16:creationId xmlns:a16="http://schemas.microsoft.com/office/drawing/2014/main" id="{1EF2ABFB-3CEA-4724-ADCD-A590D0707516}"/>
               </a:ext>
             </a:extLst>
           </p:cNvPr>
@@ -4038,7 +3978,7 @@
           <p:cNvPr id="8" name="">
             <a:extLst xmlns:a="http://schemas.openxmlformats.org/drawingml/2006/main">
               <a:ext uri="{FF2B5EF4-FFF2-40B4-BE49-F238E27FC236}">
-                <a16:creationId xmlns:a16="http://schemas.microsoft.com/office/drawing/2014/main" id="{EEA484B0-539D-4486-8FE3-5003FCFDE5AD}"/>
+                <a16:creationId xmlns:a16="http://schemas.microsoft.com/office/drawing/2014/main" id="{9F9D1B92-866F-4873-AF15-E8626521664A}"/>
               </a:ext>
             </a:extLst>
           </p:cNvPr>
@@ -4083,23 +4023,23 @@
           <p:cNvPr id="9" name="screenshot-frame">
             <a:extLst xmlns:a="http://schemas.openxmlformats.org/drawingml/2006/main">
               <a:ext uri="{FF2B5EF4-FFF2-40B4-BE49-F238E27FC236}">
-                <a16:creationId xmlns:a16="http://schemas.microsoft.com/office/drawing/2014/main" id="{45014958-EA70-446A-840A-0F450333FB29}"/>
-              </a:ext>
-            </a:extLst>
-          </p:cNvPr>
-          <p:cNvSpPr>
-            <a:spLocks xmlns:a="http://schemas.openxmlformats.org/drawingml/2006/main" noGrp="1"/>
-          </p:cNvSpPr>
-          <p:nvPr/>
-        </p:nvSpPr>
-        <p:spPr>
-          <a:xfrm xmlns:a="http://schemas.openxmlformats.org/drawingml/2006/main">
-            <a:off x="9622250" y="1524000"/>
-            <a:ext cx="3143250" cy="7239000"/>
+                <a16:creationId xmlns:a16="http://schemas.microsoft.com/office/drawing/2014/main" id="{88FF867D-FBC6-4075-BB58-91B3339B3294}"/>
+              </a:ext>
+            </a:extLst>
+          </p:cNvPr>
+          <p:cNvSpPr>
+            <a:spLocks xmlns:a="http://schemas.openxmlformats.org/drawingml/2006/main" noGrp="1"/>
+          </p:cNvSpPr>
+          <p:nvPr/>
+        </p:nvSpPr>
+        <p:spPr>
+          <a:xfrm xmlns:a="http://schemas.openxmlformats.org/drawingml/2006/main">
+            <a:off x="10698575" y="1238250"/>
+            <a:ext cx="4381500" cy="7810500"/>
           </a:xfrm>
           <a:prstGeom xmlns:a="http://schemas.openxmlformats.org/drawingml/2006/main" prst="roundRect">
             <a:avLst>
-              <a:gd name="adj" fmla="val 2424"/>
+              <a:gd name="adj" fmla="val 1739"/>
             </a:avLst>
           </a:prstGeom>
           <a:solidFill xmlns:a="http://schemas.openxmlformats.org/drawingml/2006/main">
@@ -4122,76 +4062,16 @@
           <p:nvPr/>
         </p:nvPicPr>
         <p:blipFill>
-          <a:blip xmlns:r="http://schemas.openxmlformats.org/officeDocument/2006/relationships" xmlns:a="http://schemas.openxmlformats.org/drawingml/2006/main" r:embed="Re5083d3423bc455d"/>
-          <a:srcRect xmlns:a="http://schemas.openxmlformats.org/drawingml/2006/main" l="3016" t="0" r="3016" b="0"/>
+          <a:blip xmlns:r="http://schemas.openxmlformats.org/officeDocument/2006/relationships" xmlns:a="http://schemas.openxmlformats.org/drawingml/2006/main" r:embed="Ra7d8db26ea324549"/>
+          <a:srcRect xmlns:a="http://schemas.openxmlformats.org/drawingml/2006/main" l="0" t="8814" r="0" b="8814"/>
           <a:stretch xmlns:a="http://schemas.openxmlformats.org/drawingml/2006/main">
             <a:fillRect l="0" t="0" r="0" b="0"/>
           </a:stretch>
         </p:blipFill>
         <p:spPr>
           <a:xfrm xmlns:a="http://schemas.openxmlformats.org/drawingml/2006/main">
-            <a:off x="9622250" y="1524000"/>
-            <a:ext cx="3143250" cy="7239000"/>
-          </a:xfrm>
-          <a:prstGeom xmlns:a="http://schemas.openxmlformats.org/drawingml/2006/main" prst="rect">
-            <a:avLst/>
-          </a:prstGeom>
-        </p:spPr>
-      </p:pic>
-      <p:sp>
-        <p:nvSpPr>
-          <p:cNvPr id="11" name="screenshot-frame">
-            <a:extLst xmlns:a="http://schemas.openxmlformats.org/drawingml/2006/main">
-              <a:ext uri="{FF2B5EF4-FFF2-40B4-BE49-F238E27FC236}">
-                <a16:creationId xmlns:a16="http://schemas.microsoft.com/office/drawing/2014/main" id="{4B283409-8172-4C79-BB78-9122770DE101}"/>
-              </a:ext>
-            </a:extLst>
-          </p:cNvPr>
-          <p:cNvSpPr>
-            <a:spLocks xmlns:a="http://schemas.openxmlformats.org/drawingml/2006/main" noGrp="1"/>
-          </p:cNvSpPr>
-          <p:nvPr/>
-        </p:nvSpPr>
-        <p:spPr>
-          <a:xfrm xmlns:a="http://schemas.openxmlformats.org/drawingml/2006/main">
-            <a:off x="13013150" y="1524000"/>
-            <a:ext cx="3143250" cy="7239000"/>
-          </a:xfrm>
-          <a:prstGeom xmlns:a="http://schemas.openxmlformats.org/drawingml/2006/main" prst="roundRect">
-            <a:avLst>
-              <a:gd name="adj" fmla="val 2424"/>
-            </a:avLst>
-          </a:prstGeom>
-          <a:solidFill xmlns:a="http://schemas.openxmlformats.org/drawingml/2006/main">
-            <a:srgbClr val="FFFFFF"/>
-          </a:solidFill>
-          <a:ln xmlns:a="http://schemas.openxmlformats.org/drawingml/2006/main" w="0">
-            <a:solidFill>
-              <a:srgbClr val="FFFFFF"/>
-            </a:solidFill>
-            <a:prstDash val="solid"/>
-          </a:ln>
-        </p:spPr>
-      </p:sp>
-      <p:pic>
-        <p:nvPicPr>
-          <p:cNvPr id="12" name="screenshot"/>
-          <p:cNvPicPr>
-            <a:picLocks xmlns:a="http://schemas.openxmlformats.org/drawingml/2006/main" noChangeAspect="1"/>
-          </p:cNvPicPr>
-          <p:nvPr/>
-        </p:nvPicPr>
-        <p:blipFill>
-          <a:blip xmlns:r="http://schemas.openxmlformats.org/officeDocument/2006/relationships" xmlns:a="http://schemas.openxmlformats.org/drawingml/2006/main" r:embed="R3854f7a14ed44ba4"/>
-          <a:srcRect xmlns:a="http://schemas.openxmlformats.org/drawingml/2006/main" l="3016" t="0" r="3016" b="0"/>
-          <a:stretch xmlns:a="http://schemas.openxmlformats.org/drawingml/2006/main">
-            <a:fillRect l="0" t="0" r="0" b="0"/>
-          </a:stretch>
-        </p:blipFill>
-        <p:spPr>
-          <a:xfrm xmlns:a="http://schemas.openxmlformats.org/drawingml/2006/main">
-            <a:off x="13013150" y="1524000"/>
-            <a:ext cx="3143250" cy="7239000"/>
+            <a:off x="10698575" y="1238250"/>
+            <a:ext cx="4381500" cy="7810500"/>
           </a:xfrm>
           <a:prstGeom xmlns:a="http://schemas.openxmlformats.org/drawingml/2006/main" prst="rect">
             <a:avLst/>
@@ -4201,7 +4081,7 @@
     </p:spTree>
     <p:extLst>
       <p:ext uri="{BB962C8B-B14F-4D97-AF65-F5344CB8AC3E}">
-        <p14:creationId xmlns:p14="http://schemas.microsoft.com/office/powerpoint/2010/main" val="542428250"/>
+        <p14:creationId xmlns:p14="http://schemas.microsoft.com/office/powerpoint/2010/main" val="833267397"/>
       </p:ext>
     </p:extLst>
   </p:cSld>
@@ -4232,7 +4112,7 @@
           <p:cNvPr id="1" name="bg">
             <a:extLst xmlns:a="http://schemas.openxmlformats.org/drawingml/2006/main">
               <a:ext uri="{FF2B5EF4-FFF2-40B4-BE49-F238E27FC236}">
-                <a16:creationId xmlns:a16="http://schemas.microsoft.com/office/drawing/2014/main" id="{2B31E011-4C60-4AAC-AD68-3390CFD9CA91}"/>
+                <a16:creationId xmlns:a16="http://schemas.microsoft.com/office/drawing/2014/main" id="{74C59E15-86C8-4137-A8F2-6542C9F492B1}"/>
               </a:ext>
             </a:extLst>
           </p:cNvPr>
@@ -4265,7 +4145,7 @@
           <p:cNvPr id="2" name="kicker">
             <a:extLst xmlns:a="http://schemas.openxmlformats.org/drawingml/2006/main">
               <a:ext uri="{FF2B5EF4-FFF2-40B4-BE49-F238E27FC236}">
-                <a16:creationId xmlns:a16="http://schemas.microsoft.com/office/drawing/2014/main" id="{0FBD4A68-0B8E-4B8A-A0DC-563128CC6A4F}"/>
+                <a16:creationId xmlns:a16="http://schemas.microsoft.com/office/drawing/2014/main" id="{526F275F-8626-4466-B696-16ACCD95C909}"/>
               </a:ext>
             </a:extLst>
           </p:cNvPr>
@@ -4310,7 +4190,7 @@
           <p:cNvPr id="3" name="slide-title">
             <a:extLst xmlns:a="http://schemas.openxmlformats.org/drawingml/2006/main">
               <a:ext uri="{FF2B5EF4-FFF2-40B4-BE49-F238E27FC236}">
-                <a16:creationId xmlns:a16="http://schemas.microsoft.com/office/drawing/2014/main" id="{8AA4CD24-E112-44D6-81BC-C4B090ABE474}"/>
+                <a16:creationId xmlns:a16="http://schemas.microsoft.com/office/drawing/2014/main" id="{A4698754-96C8-48F4-9415-98D42049EFB4}"/>
               </a:ext>
             </a:extLst>
           </p:cNvPr>
@@ -4355,7 +4235,7 @@
           <p:cNvPr id="4" name="">
             <a:extLst xmlns:a="http://schemas.openxmlformats.org/drawingml/2006/main">
               <a:ext uri="{FF2B5EF4-FFF2-40B4-BE49-F238E27FC236}">
-                <a16:creationId xmlns:a16="http://schemas.microsoft.com/office/drawing/2014/main" id="{8A206B2A-6D98-4FD2-95D3-18CBABA80CCC}"/>
+                <a16:creationId xmlns:a16="http://schemas.microsoft.com/office/drawing/2014/main" id="{1FFF8D6F-382A-4943-B8F5-E2265E167FF2}"/>
               </a:ext>
             </a:extLst>
           </p:cNvPr>
@@ -4400,7 +4280,7 @@
           <p:cNvPr id="5" name="pill">
             <a:extLst xmlns:a="http://schemas.openxmlformats.org/drawingml/2006/main">
               <a:ext uri="{FF2B5EF4-FFF2-40B4-BE49-F238E27FC236}">
-                <a16:creationId xmlns:a16="http://schemas.microsoft.com/office/drawing/2014/main" id="{5F3CDF53-44B4-4539-A3EB-0229ED4912EA}"/>
+                <a16:creationId xmlns:a16="http://schemas.microsoft.com/office/drawing/2014/main" id="{3CA6A0C0-9C37-4E62-9916-DBA4815E5C37}"/>
               </a:ext>
             </a:extLst>
           </p:cNvPr>
@@ -4435,7 +4315,7 @@
           <p:cNvPr id="6" name="">
             <a:extLst xmlns:a="http://schemas.openxmlformats.org/drawingml/2006/main">
               <a:ext uri="{FF2B5EF4-FFF2-40B4-BE49-F238E27FC236}">
-                <a16:creationId xmlns:a16="http://schemas.microsoft.com/office/drawing/2014/main" id="{50A6343C-4E5D-4940-A4C6-641D50DB00F6}"/>
+                <a16:creationId xmlns:a16="http://schemas.microsoft.com/office/drawing/2014/main" id="{4C1FF841-E60D-4586-A98D-E8E0A6B50FFF}"/>
               </a:ext>
             </a:extLst>
           </p:cNvPr>
@@ -4480,7 +4360,7 @@
           <p:cNvPr id="7" name="pill">
             <a:extLst xmlns:a="http://schemas.openxmlformats.org/drawingml/2006/main">
               <a:ext uri="{FF2B5EF4-FFF2-40B4-BE49-F238E27FC236}">
-                <a16:creationId xmlns:a16="http://schemas.microsoft.com/office/drawing/2014/main" id="{81BB09BA-6C0E-4FE4-B628-1F97E75C0540}"/>
+                <a16:creationId xmlns:a16="http://schemas.microsoft.com/office/drawing/2014/main" id="{99F4A632-ACBA-46E8-AB9C-BC22C2ED94B4}"/>
               </a:ext>
             </a:extLst>
           </p:cNvPr>
@@ -4515,7 +4395,7 @@
           <p:cNvPr id="8" name="">
             <a:extLst xmlns:a="http://schemas.openxmlformats.org/drawingml/2006/main">
               <a:ext uri="{FF2B5EF4-FFF2-40B4-BE49-F238E27FC236}">
-                <a16:creationId xmlns:a16="http://schemas.microsoft.com/office/drawing/2014/main" id="{CA7FB133-7083-4649-BB05-F7909CB75218}"/>
+                <a16:creationId xmlns:a16="http://schemas.microsoft.com/office/drawing/2014/main" id="{0B902C99-5A89-4251-B4A9-D84ED06959B9}"/>
               </a:ext>
             </a:extLst>
           </p:cNvPr>
@@ -4560,7 +4440,7 @@
           <p:cNvPr id="9" name="screenshot-frame">
             <a:extLst xmlns:a="http://schemas.openxmlformats.org/drawingml/2006/main">
               <a:ext uri="{FF2B5EF4-FFF2-40B4-BE49-F238E27FC236}">
-                <a16:creationId xmlns:a16="http://schemas.microsoft.com/office/drawing/2014/main" id="{71344D65-5B88-47F6-9C73-78B81D705CC8}"/>
+                <a16:creationId xmlns:a16="http://schemas.microsoft.com/office/drawing/2014/main" id="{73DAC4AF-E157-4485-9370-45C641DDD87E}"/>
               </a:ext>
             </a:extLst>
           </p:cNvPr>
@@ -4599,7 +4479,7 @@
           <p:nvPr/>
         </p:nvPicPr>
         <p:blipFill>
-          <a:blip xmlns:r="http://schemas.openxmlformats.org/officeDocument/2006/relationships" xmlns:a="http://schemas.openxmlformats.org/drawingml/2006/main" r:embed="R674fa41a466a4147"/>
+          <a:blip xmlns:r="http://schemas.openxmlformats.org/officeDocument/2006/relationships" xmlns:a="http://schemas.openxmlformats.org/drawingml/2006/main" r:embed="Ra36589e113314969"/>
           <a:stretch xmlns:a="http://schemas.openxmlformats.org/drawingml/2006/main"/>
         </p:blipFill>
         <p:spPr>
@@ -4615,7 +4495,7 @@
     </p:spTree>
     <p:extLst>
       <p:ext uri="{BB962C8B-B14F-4D97-AF65-F5344CB8AC3E}">
-        <p14:creationId xmlns:p14="http://schemas.microsoft.com/office/powerpoint/2010/main" val="2047247115"/>
+        <p14:creationId xmlns:p14="http://schemas.microsoft.com/office/powerpoint/2010/main" val="742609032"/>
       </p:ext>
     </p:extLst>
   </p:cSld>
@@ -4646,7 +4526,7 @@
           <p:cNvPr id="1" name="bg">
             <a:extLst xmlns:a="http://schemas.openxmlformats.org/drawingml/2006/main">
               <a:ext uri="{FF2B5EF4-FFF2-40B4-BE49-F238E27FC236}">
-                <a16:creationId xmlns:a16="http://schemas.microsoft.com/office/drawing/2014/main" id="{43180742-EA57-48EE-B856-4EE26F712D4A}"/>
+                <a16:creationId xmlns:a16="http://schemas.microsoft.com/office/drawing/2014/main" id="{274B3D69-05DA-40E6-A44B-9A44AD4F4ED4}"/>
               </a:ext>
             </a:extLst>
           </p:cNvPr>
@@ -4679,7 +4559,7 @@
           <p:cNvPr id="2" name="kicker">
             <a:extLst xmlns:a="http://schemas.openxmlformats.org/drawingml/2006/main">
               <a:ext uri="{FF2B5EF4-FFF2-40B4-BE49-F238E27FC236}">
-                <a16:creationId xmlns:a16="http://schemas.microsoft.com/office/drawing/2014/main" id="{EF8DCA93-C2C5-4D1B-BC3A-E048BD1F4391}"/>
+                <a16:creationId xmlns:a16="http://schemas.microsoft.com/office/drawing/2014/main" id="{BE54FECF-028D-48DE-BD70-7C5496936AB2}"/>
               </a:ext>
             </a:extLst>
           </p:cNvPr>
@@ -4724,7 +4604,7 @@
           <p:cNvPr id="3" name="slide-title">
             <a:extLst xmlns:a="http://schemas.openxmlformats.org/drawingml/2006/main">
               <a:ext uri="{FF2B5EF4-FFF2-40B4-BE49-F238E27FC236}">
-                <a16:creationId xmlns:a16="http://schemas.microsoft.com/office/drawing/2014/main" id="{58C7921F-A3B8-4A9F-873E-49C5F9EBE994}"/>
+                <a16:creationId xmlns:a16="http://schemas.microsoft.com/office/drawing/2014/main" id="{6F39ABFD-0D6F-463A-A628-2A1D552FE7C3}"/>
               </a:ext>
             </a:extLst>
           </p:cNvPr>
@@ -4769,7 +4649,7 @@
           <p:cNvPr id="4" name="pill">
             <a:extLst xmlns:a="http://schemas.openxmlformats.org/drawingml/2006/main">
               <a:ext uri="{FF2B5EF4-FFF2-40B4-BE49-F238E27FC236}">
-                <a16:creationId xmlns:a16="http://schemas.microsoft.com/office/drawing/2014/main" id="{14CCFA66-E621-459D-9F3A-031642DDADC2}"/>
+                <a16:creationId xmlns:a16="http://schemas.microsoft.com/office/drawing/2014/main" id="{272C55D1-96F4-4785-90FE-C8386E30F1BF}"/>
               </a:ext>
             </a:extLst>
           </p:cNvPr>
@@ -4804,7 +4684,7 @@
           <p:cNvPr id="5" name="">
             <a:extLst xmlns:a="http://schemas.openxmlformats.org/drawingml/2006/main">
               <a:ext uri="{FF2B5EF4-FFF2-40B4-BE49-F238E27FC236}">
-                <a16:creationId xmlns:a16="http://schemas.microsoft.com/office/drawing/2014/main" id="{5BF4D4AA-1A65-4D09-AA9F-1E5ACCC0C6F7}"/>
+                <a16:creationId xmlns:a16="http://schemas.microsoft.com/office/drawing/2014/main" id="{6F65CDAE-2265-4B33-81FA-535769A5343B}"/>
               </a:ext>
             </a:extLst>
           </p:cNvPr>
@@ -4849,7 +4729,7 @@
           <p:cNvPr id="6" name="">
             <a:extLst xmlns:a="http://schemas.openxmlformats.org/drawingml/2006/main">
               <a:ext uri="{FF2B5EF4-FFF2-40B4-BE49-F238E27FC236}">
-                <a16:creationId xmlns:a16="http://schemas.microsoft.com/office/drawing/2014/main" id="{BFEF9D2D-FF17-470A-86B7-3D8B7BFE007C}"/>
+                <a16:creationId xmlns:a16="http://schemas.microsoft.com/office/drawing/2014/main" id="{0CBA82CF-6ECF-4808-9EB2-332B276563F8}"/>
               </a:ext>
             </a:extLst>
           </p:cNvPr>
@@ -4884,7 +4764,7 @@
           <p:cNvPr id="7" name="">
             <a:extLst xmlns:a="http://schemas.openxmlformats.org/drawingml/2006/main">
               <a:ext uri="{FF2B5EF4-FFF2-40B4-BE49-F238E27FC236}">
-                <a16:creationId xmlns:a16="http://schemas.microsoft.com/office/drawing/2014/main" id="{D3F9BEC0-B321-4ACE-ADB3-BAC6642EBC30}"/>
+                <a16:creationId xmlns:a16="http://schemas.microsoft.com/office/drawing/2014/main" id="{DE5A9ED7-37C7-407D-83A1-5167C2CC8072}"/>
               </a:ext>
             </a:extLst>
           </p:cNvPr>
@@ -4929,7 +4809,7 @@
           <p:cNvPr id="8" name="">
             <a:extLst xmlns:a="http://schemas.openxmlformats.org/drawingml/2006/main">
               <a:ext uri="{FF2B5EF4-FFF2-40B4-BE49-F238E27FC236}">
-                <a16:creationId xmlns:a16="http://schemas.microsoft.com/office/drawing/2014/main" id="{8B728C93-A0A2-4C1C-8980-568952FE8086}"/>
+                <a16:creationId xmlns:a16="http://schemas.microsoft.com/office/drawing/2014/main" id="{F74A713C-D943-4298-8AD6-E6DF5ECC1F24}"/>
               </a:ext>
             </a:extLst>
           </p:cNvPr>
@@ -4974,7 +4854,7 @@
           <p:cNvPr id="9" name="">
             <a:extLst xmlns:a="http://schemas.openxmlformats.org/drawingml/2006/main">
               <a:ext uri="{FF2B5EF4-FFF2-40B4-BE49-F238E27FC236}">
-                <a16:creationId xmlns:a16="http://schemas.microsoft.com/office/drawing/2014/main" id="{D67B3420-8491-4190-9D59-ACDF301F4873}"/>
+                <a16:creationId xmlns:a16="http://schemas.microsoft.com/office/drawing/2014/main" id="{074F30DE-AC09-4D94-A77D-D3D49EEBBA18}"/>
               </a:ext>
             </a:extLst>
           </p:cNvPr>
@@ -5009,7 +4889,7 @@
           <p:cNvPr id="10" name="">
             <a:extLst xmlns:a="http://schemas.openxmlformats.org/drawingml/2006/main">
               <a:ext uri="{FF2B5EF4-FFF2-40B4-BE49-F238E27FC236}">
-                <a16:creationId xmlns:a16="http://schemas.microsoft.com/office/drawing/2014/main" id="{9076092E-DEA3-4180-A46D-B9B3E8094C6D}"/>
+                <a16:creationId xmlns:a16="http://schemas.microsoft.com/office/drawing/2014/main" id="{5FD70A1B-334A-4A36-82B6-E905FE332D35}"/>
               </a:ext>
             </a:extLst>
           </p:cNvPr>
@@ -5054,7 +4934,7 @@
           <p:cNvPr id="11" name="">
             <a:extLst xmlns:a="http://schemas.openxmlformats.org/drawingml/2006/main">
               <a:ext uri="{FF2B5EF4-FFF2-40B4-BE49-F238E27FC236}">
-                <a16:creationId xmlns:a16="http://schemas.microsoft.com/office/drawing/2014/main" id="{1F196A51-066E-4320-9F76-8BAB4D41115D}"/>
+                <a16:creationId xmlns:a16="http://schemas.microsoft.com/office/drawing/2014/main" id="{13A37563-0F4A-481D-BF56-7125305022B0}"/>
               </a:ext>
             </a:extLst>
           </p:cNvPr>
@@ -5099,7 +4979,7 @@
           <p:cNvPr id="12" name="">
             <a:extLst xmlns:a="http://schemas.openxmlformats.org/drawingml/2006/main">
               <a:ext uri="{FF2B5EF4-FFF2-40B4-BE49-F238E27FC236}">
-                <a16:creationId xmlns:a16="http://schemas.microsoft.com/office/drawing/2014/main" id="{41FA8303-B50B-4970-8649-FA69ACFCF67D}"/>
+                <a16:creationId xmlns:a16="http://schemas.microsoft.com/office/drawing/2014/main" id="{2A28C72E-E2BA-4A1B-9CC8-4AFA0320192A}"/>
               </a:ext>
             </a:extLst>
           </p:cNvPr>
@@ -5134,7 +5014,7 @@
           <p:cNvPr id="13" name="">
             <a:extLst xmlns:a="http://schemas.openxmlformats.org/drawingml/2006/main">
               <a:ext uri="{FF2B5EF4-FFF2-40B4-BE49-F238E27FC236}">
-                <a16:creationId xmlns:a16="http://schemas.microsoft.com/office/drawing/2014/main" id="{DBFE7247-33B3-41E5-8E88-98BF3EF122B4}"/>
+                <a16:creationId xmlns:a16="http://schemas.microsoft.com/office/drawing/2014/main" id="{7B80FC91-84F0-4AA2-A420-E28A7C0D7977}"/>
               </a:ext>
             </a:extLst>
           </p:cNvPr>
@@ -5179,7 +5059,7 @@
           <p:cNvPr id="14" name="">
             <a:extLst xmlns:a="http://schemas.openxmlformats.org/drawingml/2006/main">
               <a:ext uri="{FF2B5EF4-FFF2-40B4-BE49-F238E27FC236}">
-                <a16:creationId xmlns:a16="http://schemas.microsoft.com/office/drawing/2014/main" id="{82E6CA4A-3656-475B-A1CB-67BA50EE560F}"/>
+                <a16:creationId xmlns:a16="http://schemas.microsoft.com/office/drawing/2014/main" id="{3129DD10-89E3-4871-8187-BAA921665122}"/>
               </a:ext>
             </a:extLst>
           </p:cNvPr>
@@ -5224,7 +5104,7 @@
           <p:cNvPr id="15" name="">
             <a:extLst xmlns:a="http://schemas.openxmlformats.org/drawingml/2006/main">
               <a:ext uri="{FF2B5EF4-FFF2-40B4-BE49-F238E27FC236}">
-                <a16:creationId xmlns:a16="http://schemas.microsoft.com/office/drawing/2014/main" id="{C7DE7546-1C34-4AE2-90E4-2B318CC82BCB}"/>
+                <a16:creationId xmlns:a16="http://schemas.microsoft.com/office/drawing/2014/main" id="{0ABB51B2-FDF0-4646-8E12-637379D7956B}"/>
               </a:ext>
             </a:extLst>
           </p:cNvPr>
@@ -5259,7 +5139,7 @@
           <p:cNvPr id="16" name="">
             <a:extLst xmlns:a="http://schemas.openxmlformats.org/drawingml/2006/main">
               <a:ext uri="{FF2B5EF4-FFF2-40B4-BE49-F238E27FC236}">
-                <a16:creationId xmlns:a16="http://schemas.microsoft.com/office/drawing/2014/main" id="{F0990652-E284-481E-9065-C5BE43C37F35}"/>
+                <a16:creationId xmlns:a16="http://schemas.microsoft.com/office/drawing/2014/main" id="{65F2C6EB-A56F-43E1-9B96-467DE7EA597A}"/>
               </a:ext>
             </a:extLst>
           </p:cNvPr>
@@ -5304,7 +5184,7 @@
           <p:cNvPr id="17" name="">
             <a:extLst xmlns:a="http://schemas.openxmlformats.org/drawingml/2006/main">
               <a:ext uri="{FF2B5EF4-FFF2-40B4-BE49-F238E27FC236}">
-                <a16:creationId xmlns:a16="http://schemas.microsoft.com/office/drawing/2014/main" id="{364FD414-D38E-46B7-9979-AD34CA46D41D}"/>
+                <a16:creationId xmlns:a16="http://schemas.microsoft.com/office/drawing/2014/main" id="{46835890-7B0C-4B2E-8369-F885B680B635}"/>
               </a:ext>
             </a:extLst>
           </p:cNvPr>
@@ -5349,7 +5229,7 @@
           <p:cNvPr id="18" name="">
             <a:extLst xmlns:a="http://schemas.openxmlformats.org/drawingml/2006/main">
               <a:ext uri="{FF2B5EF4-FFF2-40B4-BE49-F238E27FC236}">
-                <a16:creationId xmlns:a16="http://schemas.microsoft.com/office/drawing/2014/main" id="{43DABE5E-20B2-4ECB-AEE7-CCD023C145C8}"/>
+                <a16:creationId xmlns:a16="http://schemas.microsoft.com/office/drawing/2014/main" id="{26A53ECD-E161-44A3-8222-8A9CDC293C69}"/>
               </a:ext>
             </a:extLst>
           </p:cNvPr>
@@ -5384,7 +5264,7 @@
           <p:cNvPr id="19" name="">
             <a:extLst xmlns:a="http://schemas.openxmlformats.org/drawingml/2006/main">
               <a:ext uri="{FF2B5EF4-FFF2-40B4-BE49-F238E27FC236}">
-                <a16:creationId xmlns:a16="http://schemas.microsoft.com/office/drawing/2014/main" id="{70F567AE-CFDE-4E22-8BB2-2AEEAE530CB7}"/>
+                <a16:creationId xmlns:a16="http://schemas.microsoft.com/office/drawing/2014/main" id="{5A616933-309B-46DD-9156-01998E8D51B4}"/>
               </a:ext>
             </a:extLst>
           </p:cNvPr>
@@ -5429,7 +5309,7 @@
           <p:cNvPr id="20" name="">
             <a:extLst xmlns:a="http://schemas.openxmlformats.org/drawingml/2006/main">
               <a:ext uri="{FF2B5EF4-FFF2-40B4-BE49-F238E27FC236}">
-                <a16:creationId xmlns:a16="http://schemas.microsoft.com/office/drawing/2014/main" id="{327EF9D6-7CCA-4CB3-97B9-8A8339F0BB2E}"/>
+                <a16:creationId xmlns:a16="http://schemas.microsoft.com/office/drawing/2014/main" id="{91B1F497-2E9F-471D-AC69-487A462F2723}"/>
               </a:ext>
             </a:extLst>
           </p:cNvPr>
@@ -5474,7 +5354,7 @@
           <p:cNvPr id="21" name="">
             <a:extLst xmlns:a="http://schemas.openxmlformats.org/drawingml/2006/main">
               <a:ext uri="{FF2B5EF4-FFF2-40B4-BE49-F238E27FC236}">
-                <a16:creationId xmlns:a16="http://schemas.microsoft.com/office/drawing/2014/main" id="{2B11B1EE-4F7A-4896-A2A9-12DEF9A03F68}"/>
+                <a16:creationId xmlns:a16="http://schemas.microsoft.com/office/drawing/2014/main" id="{23D08B01-1316-40F4-AF6B-0ABEDA44B06B}"/>
               </a:ext>
             </a:extLst>
           </p:cNvPr>
@@ -5509,7 +5389,7 @@
           <p:cNvPr id="22" name="">
             <a:extLst xmlns:a="http://schemas.openxmlformats.org/drawingml/2006/main">
               <a:ext uri="{FF2B5EF4-FFF2-40B4-BE49-F238E27FC236}">
-                <a16:creationId xmlns:a16="http://schemas.microsoft.com/office/drawing/2014/main" id="{5B03BD58-4A72-4E35-AA30-5B3D082E15C5}"/>
+                <a16:creationId xmlns:a16="http://schemas.microsoft.com/office/drawing/2014/main" id="{5B6E0661-DE31-42A0-A84F-FF876613D20A}"/>
               </a:ext>
             </a:extLst>
           </p:cNvPr>
@@ -5554,7 +5434,7 @@
           <p:cNvPr id="23" name="">
             <a:extLst xmlns:a="http://schemas.openxmlformats.org/drawingml/2006/main">
               <a:ext uri="{FF2B5EF4-FFF2-40B4-BE49-F238E27FC236}">
-                <a16:creationId xmlns:a16="http://schemas.microsoft.com/office/drawing/2014/main" id="{9ED5BEA2-F1C2-4DAC-AA66-9CE7525EF414}"/>
+                <a16:creationId xmlns:a16="http://schemas.microsoft.com/office/drawing/2014/main" id="{F311EBFF-B9CD-4A0A-BD53-33F0A377F6F4}"/>
               </a:ext>
             </a:extLst>
           </p:cNvPr>
@@ -5599,7 +5479,7 @@
           <p:cNvPr id="24" name="">
             <a:extLst xmlns:a="http://schemas.openxmlformats.org/drawingml/2006/main">
               <a:ext uri="{FF2B5EF4-FFF2-40B4-BE49-F238E27FC236}">
-                <a16:creationId xmlns:a16="http://schemas.microsoft.com/office/drawing/2014/main" id="{3EB55DA2-43D6-4AE5-B2B0-4F848D16AFC3}"/>
+                <a16:creationId xmlns:a16="http://schemas.microsoft.com/office/drawing/2014/main" id="{DB40D130-E350-4433-9736-0E96C2154202}"/>
               </a:ext>
             </a:extLst>
           </p:cNvPr>
@@ -5634,7 +5514,7 @@
           <p:cNvPr id="25" name="">
             <a:extLst xmlns:a="http://schemas.openxmlformats.org/drawingml/2006/main">
               <a:ext uri="{FF2B5EF4-FFF2-40B4-BE49-F238E27FC236}">
-                <a16:creationId xmlns:a16="http://schemas.microsoft.com/office/drawing/2014/main" id="{64E9EC9C-3D7D-4D09-9D16-3D869674C89B}"/>
+                <a16:creationId xmlns:a16="http://schemas.microsoft.com/office/drawing/2014/main" id="{4B5FCE45-EF07-4CDB-BC05-30F67671FCD1}"/>
               </a:ext>
             </a:extLst>
           </p:cNvPr>
@@ -5679,7 +5559,7 @@
           <p:cNvPr id="26" name="">
             <a:extLst xmlns:a="http://schemas.openxmlformats.org/drawingml/2006/main">
               <a:ext uri="{FF2B5EF4-FFF2-40B4-BE49-F238E27FC236}">
-                <a16:creationId xmlns:a16="http://schemas.microsoft.com/office/drawing/2014/main" id="{4B0A7F8F-40D0-410C-B82B-E2AF51E558C6}"/>
+                <a16:creationId xmlns:a16="http://schemas.microsoft.com/office/drawing/2014/main" id="{F9876EDE-2107-45D5-ABB7-7EBA1C921567}"/>
               </a:ext>
             </a:extLst>
           </p:cNvPr>
@@ -5724,7 +5604,7 @@
           <p:cNvPr id="27" name="">
             <a:extLst xmlns:a="http://schemas.openxmlformats.org/drawingml/2006/main">
               <a:ext uri="{FF2B5EF4-FFF2-40B4-BE49-F238E27FC236}">
-                <a16:creationId xmlns:a16="http://schemas.microsoft.com/office/drawing/2014/main" id="{3540E80D-2318-4915-8FC6-53BCA9BFA41F}"/>
+                <a16:creationId xmlns:a16="http://schemas.microsoft.com/office/drawing/2014/main" id="{04BFBF15-8EA6-4AE0-8062-CDD1C9AFAC1F}"/>
               </a:ext>
             </a:extLst>
           </p:cNvPr>
@@ -5759,7 +5639,7 @@
           <p:cNvPr id="28" name="">
             <a:extLst xmlns:a="http://schemas.openxmlformats.org/drawingml/2006/main">
               <a:ext uri="{FF2B5EF4-FFF2-40B4-BE49-F238E27FC236}">
-                <a16:creationId xmlns:a16="http://schemas.microsoft.com/office/drawing/2014/main" id="{81EC3A98-B759-43E4-BB24-BA9D94DAA9E5}"/>
+                <a16:creationId xmlns:a16="http://schemas.microsoft.com/office/drawing/2014/main" id="{8FAD6331-A03B-4B57-80C5-D1BEF917C2A4}"/>
               </a:ext>
             </a:extLst>
           </p:cNvPr>
@@ -5804,7 +5684,7 @@
           <p:cNvPr id="29" name="">
             <a:extLst xmlns:a="http://schemas.openxmlformats.org/drawingml/2006/main">
               <a:ext uri="{FF2B5EF4-FFF2-40B4-BE49-F238E27FC236}">
-                <a16:creationId xmlns:a16="http://schemas.microsoft.com/office/drawing/2014/main" id="{189D5AE0-C2F1-4113-B501-E757C263A231}"/>
+                <a16:creationId xmlns:a16="http://schemas.microsoft.com/office/drawing/2014/main" id="{743249B4-F553-48C1-91F2-CF511DF1B4E7}"/>
               </a:ext>
             </a:extLst>
           </p:cNvPr>
@@ -5849,7 +5729,7 @@
           <p:cNvPr id="30" name="">
             <a:extLst xmlns:a="http://schemas.openxmlformats.org/drawingml/2006/main">
               <a:ext uri="{FF2B5EF4-FFF2-40B4-BE49-F238E27FC236}">
-                <a16:creationId xmlns:a16="http://schemas.microsoft.com/office/drawing/2014/main" id="{65D52C6E-9810-4D17-9848-425D02E11BD2}"/>
+                <a16:creationId xmlns:a16="http://schemas.microsoft.com/office/drawing/2014/main" id="{129D1C23-9BD5-4495-9AB0-02A229B8A4C5}"/>
               </a:ext>
             </a:extLst>
           </p:cNvPr>
@@ -5884,7 +5764,7 @@
           <p:cNvPr id="31" name="">
             <a:extLst xmlns:a="http://schemas.openxmlformats.org/drawingml/2006/main">
               <a:ext uri="{FF2B5EF4-FFF2-40B4-BE49-F238E27FC236}">
-                <a16:creationId xmlns:a16="http://schemas.microsoft.com/office/drawing/2014/main" id="{D4ECF590-D1B3-4C62-A9DC-7051CB8A1F02}"/>
+                <a16:creationId xmlns:a16="http://schemas.microsoft.com/office/drawing/2014/main" id="{364FF412-8BDB-473E-899C-7F7FB2E5FD17}"/>
               </a:ext>
             </a:extLst>
           </p:cNvPr>
@@ -5929,7 +5809,7 @@
           <p:cNvPr id="32" name="">
             <a:extLst xmlns:a="http://schemas.openxmlformats.org/drawingml/2006/main">
               <a:ext uri="{FF2B5EF4-FFF2-40B4-BE49-F238E27FC236}">
-                <a16:creationId xmlns:a16="http://schemas.microsoft.com/office/drawing/2014/main" id="{8EBAC43B-2C83-44CA-8CAD-2160F8B44D1E}"/>
+                <a16:creationId xmlns:a16="http://schemas.microsoft.com/office/drawing/2014/main" id="{79CD923D-4FC3-4354-A589-19FB749457DD}"/>
               </a:ext>
             </a:extLst>
           </p:cNvPr>
@@ -5972,7 +5852,7 @@
     </p:spTree>
     <p:extLst>
       <p:ext uri="{BB962C8B-B14F-4D97-AF65-F5344CB8AC3E}">
-        <p14:creationId xmlns:p14="http://schemas.microsoft.com/office/powerpoint/2010/main" val="228805295"/>
+        <p14:creationId xmlns:p14="http://schemas.microsoft.com/office/powerpoint/2010/main" val="1758211305"/>
       </p:ext>
     </p:extLst>
   </p:cSld>
@@ -6003,7 +5883,7 @@
           <p:cNvPr id="1" name="bg">
             <a:extLst xmlns:a="http://schemas.openxmlformats.org/drawingml/2006/main">
               <a:ext uri="{FF2B5EF4-FFF2-40B4-BE49-F238E27FC236}">
-                <a16:creationId xmlns:a16="http://schemas.microsoft.com/office/drawing/2014/main" id="{149071A9-F63C-4C84-9C4B-D444478A9178}"/>
+                <a16:creationId xmlns:a16="http://schemas.microsoft.com/office/drawing/2014/main" id="{85280020-C601-4581-925E-ADAE5D4C0568}"/>
               </a:ext>
             </a:extLst>
           </p:cNvPr>
@@ -6036,7 +5916,7 @@
           <p:cNvPr id="2" name="kicker">
             <a:extLst xmlns:a="http://schemas.openxmlformats.org/drawingml/2006/main">
               <a:ext uri="{FF2B5EF4-FFF2-40B4-BE49-F238E27FC236}">
-                <a16:creationId xmlns:a16="http://schemas.microsoft.com/office/drawing/2014/main" id="{FFFAAEFB-7399-474F-B725-50B0291EEEAB}"/>
+                <a16:creationId xmlns:a16="http://schemas.microsoft.com/office/drawing/2014/main" id="{6C855EB6-E1EC-448A-B3E0-999700864328}"/>
               </a:ext>
             </a:extLst>
           </p:cNvPr>
@@ -6081,7 +5961,7 @@
           <p:cNvPr id="3" name="slide-title">
             <a:extLst xmlns:a="http://schemas.openxmlformats.org/drawingml/2006/main">
               <a:ext uri="{FF2B5EF4-FFF2-40B4-BE49-F238E27FC236}">
-                <a16:creationId xmlns:a16="http://schemas.microsoft.com/office/drawing/2014/main" id="{1BBCFDF1-89C0-4951-A3C9-E89C5A19E234}"/>
+                <a16:creationId xmlns:a16="http://schemas.microsoft.com/office/drawing/2014/main" id="{7A3723EB-3788-45AC-B9E0-6CD026D8AC64}"/>
               </a:ext>
             </a:extLst>
           </p:cNvPr>
@@ -6126,7 +6006,7 @@
           <p:cNvPr id="4" name="">
             <a:extLst xmlns:a="http://schemas.openxmlformats.org/drawingml/2006/main">
               <a:ext uri="{FF2B5EF4-FFF2-40B4-BE49-F238E27FC236}">
-                <a16:creationId xmlns:a16="http://schemas.microsoft.com/office/drawing/2014/main" id="{8EEAB6CC-B695-4515-BD0D-2A5FDA4EC1D1}"/>
+                <a16:creationId xmlns:a16="http://schemas.microsoft.com/office/drawing/2014/main" id="{1BEEFD6D-D9D0-48BA-8F82-E14BB88E87D7}"/>
               </a:ext>
             </a:extLst>
           </p:cNvPr>
@@ -6171,39 +6051,74 @@
           <p:cNvPr id="5" name="">
             <a:extLst xmlns:a="http://schemas.openxmlformats.org/drawingml/2006/main">
               <a:ext uri="{FF2B5EF4-FFF2-40B4-BE49-F238E27FC236}">
-                <a16:creationId xmlns:a16="http://schemas.microsoft.com/office/drawing/2014/main" id="{74813C28-64B4-494C-8278-C845275D3C6A}"/>
-              </a:ext>
-            </a:extLst>
-          </p:cNvPr>
-          <p:cNvSpPr>
-            <a:spLocks xmlns:a="http://schemas.openxmlformats.org/drawingml/2006/main" noGrp="1"/>
-          </p:cNvSpPr>
-          <p:nvPr/>
-        </p:nvSpPr>
-        <p:spPr>
-          <a:xfrm xmlns:a="http://schemas.openxmlformats.org/drawingml/2006/main">
-            <a:off x="9639300" y="3543300"/>
-            <a:ext cx="2571750" cy="571500"/>
-          </a:xfrm>
-          <a:prstGeom xmlns:a="http://schemas.openxmlformats.org/drawingml/2006/main" prst="rect">
-            <a:avLst/>
-          </a:prstGeom>
-        </p:spPr>
-        <p:txBody>
-          <a:bodyPr xmlns:a="http://schemas.openxmlformats.org/drawingml/2006/main" lIns="0" tIns="0" rIns="0" bIns="0"/>
-          <a:lstStyle xmlns:a="http://schemas.openxmlformats.org/drawingml/2006/main"/>
-          <a:p xmlns:a="http://schemas.openxmlformats.org/drawingml/2006/main">
-            <a:pPr>
-              <a:defRPr sz="4350" b="1">
-                <a:solidFill>
-                  <a:srgbClr val="6D5DFB"/>
-                </a:solidFill>
-              </a:defRPr>
-            </a:pPr>
-            <a:r>
-              <a:rPr sz="4350" b="1">
-                <a:solidFill>
-                  <a:srgbClr val="6D5DFB"/>
+                <a16:creationId xmlns:a16="http://schemas.microsoft.com/office/drawing/2014/main" id="{B3070A94-D04F-408C-897B-5111E999BE88}"/>
+              </a:ext>
+            </a:extLst>
+          </p:cNvPr>
+          <p:cNvSpPr>
+            <a:spLocks xmlns:a="http://schemas.openxmlformats.org/drawingml/2006/main" noGrp="1"/>
+          </p:cNvSpPr>
+          <p:nvPr/>
+        </p:nvSpPr>
+        <p:spPr>
+          <a:xfrm xmlns:a="http://schemas.openxmlformats.org/drawingml/2006/main">
+            <a:off x="9645396" y="2138363"/>
+            <a:ext cx="7766304" cy="1257300"/>
+          </a:xfrm>
+          <a:prstGeom xmlns:a="http://schemas.openxmlformats.org/drawingml/2006/main" prst="roundRect">
+            <a:avLst>
+              <a:gd name="adj" fmla="val 6061"/>
+            </a:avLst>
+          </a:prstGeom>
+          <a:solidFill xmlns:a="http://schemas.openxmlformats.org/drawingml/2006/main">
+            <a:srgbClr val="EAE8FF"/>
+          </a:solidFill>
+          <a:ln xmlns:a="http://schemas.openxmlformats.org/drawingml/2006/main" w="9525">
+            <a:solidFill>
+              <a:srgbClr val="EAE8FF"/>
+            </a:solidFill>
+            <a:prstDash val="solid"/>
+          </a:ln>
+        </p:spPr>
+      </p:sp>
+      <p:sp>
+        <p:nvSpPr>
+          <p:cNvPr id="6" name="">
+            <a:extLst xmlns:a="http://schemas.openxmlformats.org/drawingml/2006/main">
+              <a:ext uri="{FF2B5EF4-FFF2-40B4-BE49-F238E27FC236}">
+                <a16:creationId xmlns:a16="http://schemas.microsoft.com/office/drawing/2014/main" id="{96AA774C-3856-49FE-A610-532AB62BF866}"/>
+              </a:ext>
+            </a:extLst>
+          </p:cNvPr>
+          <p:cNvSpPr>
+            <a:spLocks xmlns:a="http://schemas.openxmlformats.org/drawingml/2006/main" noGrp="1"/>
+          </p:cNvSpPr>
+          <p:nvPr/>
+        </p:nvSpPr>
+        <p:spPr>
+          <a:xfrm xmlns:a="http://schemas.openxmlformats.org/drawingml/2006/main">
+            <a:off x="9867900" y="2514600"/>
+            <a:ext cx="7315200" cy="247650"/>
+          </a:xfrm>
+          <a:prstGeom xmlns:a="http://schemas.openxmlformats.org/drawingml/2006/main" prst="rect">
+            <a:avLst/>
+          </a:prstGeom>
+        </p:spPr>
+        <p:txBody>
+          <a:bodyPr xmlns:a="http://schemas.openxmlformats.org/drawingml/2006/main" lIns="0" tIns="0" rIns="0" bIns="0"/>
+          <a:lstStyle xmlns:a="http://schemas.openxmlformats.org/drawingml/2006/main"/>
+          <a:p xmlns:a="http://schemas.openxmlformats.org/drawingml/2006/main">
+            <a:pPr>
+              <a:defRPr sz="1950" b="1">
+                <a:solidFill>
+                  <a:srgbClr val="111827"/>
+                </a:solidFill>
+              </a:defRPr>
+            </a:pPr>
+            <a:r>
+              <a:rPr sz="1950" b="1">
+                <a:solidFill>
+                  <a:srgbClr val="111827"/>
                 </a:solidFill>
               </a:rPr>
               <a:t>AI</a:t>
@@ -6213,89 +6128,124 @@
       </p:sp>
       <p:sp>
         <p:nvSpPr>
-          <p:cNvPr id="6" name="">
-            <a:extLst xmlns:a="http://schemas.openxmlformats.org/drawingml/2006/main">
-              <a:ext uri="{FF2B5EF4-FFF2-40B4-BE49-F238E27FC236}">
-                <a16:creationId xmlns:a16="http://schemas.microsoft.com/office/drawing/2014/main" id="{9A4CBC82-FFC5-420C-A6A6-5879A0E75719}"/>
-              </a:ext>
-            </a:extLst>
-          </p:cNvPr>
-          <p:cNvSpPr>
-            <a:spLocks xmlns:a="http://schemas.openxmlformats.org/drawingml/2006/main" noGrp="1"/>
-          </p:cNvSpPr>
-          <p:nvPr/>
-        </p:nvSpPr>
-        <p:spPr>
-          <a:xfrm xmlns:a="http://schemas.openxmlformats.org/drawingml/2006/main">
-            <a:off x="12382500" y="3714750"/>
-            <a:ext cx="5029200" cy="228600"/>
-          </a:xfrm>
-          <a:prstGeom xmlns:a="http://schemas.openxmlformats.org/drawingml/2006/main" prst="rect">
-            <a:avLst/>
-          </a:prstGeom>
-        </p:spPr>
-        <p:txBody>
-          <a:bodyPr xmlns:a="http://schemas.openxmlformats.org/drawingml/2006/main" lIns="0" tIns="0" rIns="0" bIns="0"/>
-          <a:lstStyle xmlns:a="http://schemas.openxmlformats.org/drawingml/2006/main"/>
-          <a:p xmlns:a="http://schemas.openxmlformats.org/drawingml/2006/main">
-            <a:pPr>
-              <a:defRPr sz="1800" b="0">
+          <p:cNvPr id="7" name="">
+            <a:extLst xmlns:a="http://schemas.openxmlformats.org/drawingml/2006/main">
+              <a:ext uri="{FF2B5EF4-FFF2-40B4-BE49-F238E27FC236}">
+                <a16:creationId xmlns:a16="http://schemas.microsoft.com/office/drawing/2014/main" id="{ACE596C3-2025-4673-BD77-8C60C069B6E7}"/>
+              </a:ext>
+            </a:extLst>
+          </p:cNvPr>
+          <p:cNvSpPr>
+            <a:spLocks xmlns:a="http://schemas.openxmlformats.org/drawingml/2006/main" noGrp="1"/>
+          </p:cNvSpPr>
+          <p:nvPr/>
+        </p:nvSpPr>
+        <p:spPr>
+          <a:xfrm xmlns:a="http://schemas.openxmlformats.org/drawingml/2006/main">
+            <a:off x="9867900" y="2838450"/>
+            <a:ext cx="7315200" cy="171450"/>
+          </a:xfrm>
+          <a:prstGeom xmlns:a="http://schemas.openxmlformats.org/drawingml/2006/main" prst="rect">
+            <a:avLst/>
+          </a:prstGeom>
+        </p:spPr>
+        <p:txBody>
+          <a:bodyPr xmlns:a="http://schemas.openxmlformats.org/drawingml/2006/main" lIns="0" tIns="0" rIns="0" bIns="0"/>
+          <a:lstStyle xmlns:a="http://schemas.openxmlformats.org/drawingml/2006/main"/>
+          <a:p xmlns:a="http://schemas.openxmlformats.org/drawingml/2006/main">
+            <a:pPr>
+              <a:defRPr sz="1275" b="0">
+                <a:solidFill>
+                  <a:srgbClr val="5B6472"/>
+                </a:solidFill>
+              </a:defRPr>
+            </a:pPr>
+            <a:r>
+              <a:rPr sz="1275" b="0">
+                <a:solidFill>
+                  <a:srgbClr val="5B6472"/>
+                </a:solidFill>
+              </a:rPr>
+              <a:t>подсказывает, объясняет и помогает сопоставлять</a:t>
+            </a:r>
+          </a:p>
+        </p:txBody>
+      </p:sp>
+      <p:sp>
+        <p:nvSpPr>
+          <p:cNvPr id="8" name="">
+            <a:extLst xmlns:a="http://schemas.openxmlformats.org/drawingml/2006/main">
+              <a:ext uri="{FF2B5EF4-FFF2-40B4-BE49-F238E27FC236}">
+                <a16:creationId xmlns:a16="http://schemas.microsoft.com/office/drawing/2014/main" id="{ECC93216-FA6D-4E30-9DA5-DE5823EA6705}"/>
+              </a:ext>
+            </a:extLst>
+          </p:cNvPr>
+          <p:cNvSpPr>
+            <a:spLocks xmlns:a="http://schemas.openxmlformats.org/drawingml/2006/main" noGrp="1"/>
+          </p:cNvSpPr>
+          <p:nvPr/>
+        </p:nvSpPr>
+        <p:spPr>
+          <a:xfrm xmlns:a="http://schemas.openxmlformats.org/drawingml/2006/main">
+            <a:off x="9645396" y="3624263"/>
+            <a:ext cx="7766304" cy="1257300"/>
+          </a:xfrm>
+          <a:prstGeom xmlns:a="http://schemas.openxmlformats.org/drawingml/2006/main" prst="roundRect">
+            <a:avLst>
+              <a:gd name="adj" fmla="val 6061"/>
+            </a:avLst>
+          </a:prstGeom>
+          <a:solidFill xmlns:a="http://schemas.openxmlformats.org/drawingml/2006/main">
+            <a:srgbClr val="DFF6E9"/>
+          </a:solidFill>
+          <a:ln xmlns:a="http://schemas.openxmlformats.org/drawingml/2006/main" w="9525">
+            <a:solidFill>
+              <a:srgbClr val="DFF6E9"/>
+            </a:solidFill>
+            <a:prstDash val="solid"/>
+          </a:ln>
+        </p:spPr>
+      </p:sp>
+      <p:sp>
+        <p:nvSpPr>
+          <p:cNvPr id="9" name="">
+            <a:extLst xmlns:a="http://schemas.openxmlformats.org/drawingml/2006/main">
+              <a:ext uri="{FF2B5EF4-FFF2-40B4-BE49-F238E27FC236}">
+                <a16:creationId xmlns:a16="http://schemas.microsoft.com/office/drawing/2014/main" id="{348A4EBC-FE08-42C4-BDEE-34CD4D8068CC}"/>
+              </a:ext>
+            </a:extLst>
+          </p:cNvPr>
+          <p:cNvSpPr>
+            <a:spLocks xmlns:a="http://schemas.openxmlformats.org/drawingml/2006/main" noGrp="1"/>
+          </p:cNvSpPr>
+          <p:nvPr/>
+        </p:nvSpPr>
+        <p:spPr>
+          <a:xfrm xmlns:a="http://schemas.openxmlformats.org/drawingml/2006/main">
+            <a:off x="9867900" y="4000500"/>
+            <a:ext cx="7315200" cy="247650"/>
+          </a:xfrm>
+          <a:prstGeom xmlns:a="http://schemas.openxmlformats.org/drawingml/2006/main" prst="rect">
+            <a:avLst/>
+          </a:prstGeom>
+        </p:spPr>
+        <p:txBody>
+          <a:bodyPr xmlns:a="http://schemas.openxmlformats.org/drawingml/2006/main" lIns="0" tIns="0" rIns="0" bIns="0"/>
+          <a:lstStyle xmlns:a="http://schemas.openxmlformats.org/drawingml/2006/main"/>
+          <a:p xmlns:a="http://schemas.openxmlformats.org/drawingml/2006/main">
+            <a:pPr>
+              <a:defRPr sz="1950" b="1">
                 <a:solidFill>
                   <a:srgbClr val="111827"/>
                 </a:solidFill>
               </a:defRPr>
             </a:pPr>
             <a:r>
-              <a:rPr sz="1800" b="0">
+              <a:rPr sz="1950" b="1">
                 <a:solidFill>
                   <a:srgbClr val="111827"/>
                 </a:solidFill>
               </a:rPr>
-              <a:t>только подсказка для скрининга и сопоставления</a:t>
-            </a:r>
-          </a:p>
-        </p:txBody>
-      </p:sp>
-      <p:sp>
-        <p:nvSpPr>
-          <p:cNvPr id="7" name="">
-            <a:extLst xmlns:a="http://schemas.openxmlformats.org/drawingml/2006/main">
-              <a:ext uri="{FF2B5EF4-FFF2-40B4-BE49-F238E27FC236}">
-                <a16:creationId xmlns:a16="http://schemas.microsoft.com/office/drawing/2014/main" id="{0214316F-B5FD-47E1-8508-ABF89EFBA1C5}"/>
-              </a:ext>
-            </a:extLst>
-          </p:cNvPr>
-          <p:cNvSpPr>
-            <a:spLocks xmlns:a="http://schemas.openxmlformats.org/drawingml/2006/main" noGrp="1"/>
-          </p:cNvSpPr>
-          <p:nvPr/>
-        </p:nvSpPr>
-        <p:spPr>
-          <a:xfrm xmlns:a="http://schemas.openxmlformats.org/drawingml/2006/main">
-            <a:off x="9639300" y="4324350"/>
-            <a:ext cx="2571750" cy="571500"/>
-          </a:xfrm>
-          <a:prstGeom xmlns:a="http://schemas.openxmlformats.org/drawingml/2006/main" prst="rect">
-            <a:avLst/>
-          </a:prstGeom>
-        </p:spPr>
-        <p:txBody>
-          <a:bodyPr xmlns:a="http://schemas.openxmlformats.org/drawingml/2006/main" lIns="0" tIns="0" rIns="0" bIns="0"/>
-          <a:lstStyle xmlns:a="http://schemas.openxmlformats.org/drawingml/2006/main"/>
-          <a:p xmlns:a="http://schemas.openxmlformats.org/drawingml/2006/main">
-            <a:pPr>
-              <a:defRPr sz="4350" b="1">
-                <a:solidFill>
-                  <a:srgbClr val="2F9E6D"/>
-                </a:solidFill>
-              </a:defRPr>
-            </a:pPr>
-            <a:r>
-              <a:rPr sz="4350" b="1">
-                <a:solidFill>
-                  <a:srgbClr val="2F9E6D"/>
-                </a:solidFill>
-              </a:rPr>
               <a:t>JumysAI</a:t>
             </a:r>
           </a:p>
@@ -6303,89 +6253,124 @@
       </p:sp>
       <p:sp>
         <p:nvSpPr>
-          <p:cNvPr id="8" name="">
-            <a:extLst xmlns:a="http://schemas.openxmlformats.org/drawingml/2006/main">
-              <a:ext uri="{FF2B5EF4-FFF2-40B4-BE49-F238E27FC236}">
-                <a16:creationId xmlns:a16="http://schemas.microsoft.com/office/drawing/2014/main" id="{3E3C9715-0816-422B-949E-DD57C7FBB5DA}"/>
-              </a:ext>
-            </a:extLst>
-          </p:cNvPr>
-          <p:cNvSpPr>
-            <a:spLocks xmlns:a="http://schemas.openxmlformats.org/drawingml/2006/main" noGrp="1"/>
-          </p:cNvSpPr>
-          <p:nvPr/>
-        </p:nvSpPr>
-        <p:spPr>
-          <a:xfrm xmlns:a="http://schemas.openxmlformats.org/drawingml/2006/main">
-            <a:off x="12382500" y="4495800"/>
-            <a:ext cx="5029200" cy="228600"/>
-          </a:xfrm>
-          <a:prstGeom xmlns:a="http://schemas.openxmlformats.org/drawingml/2006/main" prst="rect">
-            <a:avLst/>
-          </a:prstGeom>
-        </p:spPr>
-        <p:txBody>
-          <a:bodyPr xmlns:a="http://schemas.openxmlformats.org/drawingml/2006/main" lIns="0" tIns="0" rIns="0" bIns="0"/>
-          <a:lstStyle xmlns:a="http://schemas.openxmlformats.org/drawingml/2006/main"/>
-          <a:p xmlns:a="http://schemas.openxmlformats.org/drawingml/2006/main">
-            <a:pPr>
-              <a:defRPr sz="1800" b="0">
+          <p:cNvPr id="10" name="">
+            <a:extLst xmlns:a="http://schemas.openxmlformats.org/drawingml/2006/main">
+              <a:ext uri="{FF2B5EF4-FFF2-40B4-BE49-F238E27FC236}">
+                <a16:creationId xmlns:a16="http://schemas.microsoft.com/office/drawing/2014/main" id="{26FDCB90-8D97-4A53-8DB8-C7F027F51C46}"/>
+              </a:ext>
+            </a:extLst>
+          </p:cNvPr>
+          <p:cNvSpPr>
+            <a:spLocks xmlns:a="http://schemas.openxmlformats.org/drawingml/2006/main" noGrp="1"/>
+          </p:cNvSpPr>
+          <p:nvPr/>
+        </p:nvSpPr>
+        <p:spPr>
+          <a:xfrm xmlns:a="http://schemas.openxmlformats.org/drawingml/2006/main">
+            <a:off x="9867900" y="4324350"/>
+            <a:ext cx="7315200" cy="171450"/>
+          </a:xfrm>
+          <a:prstGeom xmlns:a="http://schemas.openxmlformats.org/drawingml/2006/main" prst="rect">
+            <a:avLst/>
+          </a:prstGeom>
+        </p:spPr>
+        <p:txBody>
+          <a:bodyPr xmlns:a="http://schemas.openxmlformats.org/drawingml/2006/main" lIns="0" tIns="0" rIns="0" bIns="0"/>
+          <a:lstStyle xmlns:a="http://schemas.openxmlformats.org/drawingml/2006/main"/>
+          <a:p xmlns:a="http://schemas.openxmlformats.org/drawingml/2006/main">
+            <a:pPr>
+              <a:defRPr sz="1275" b="0">
+                <a:solidFill>
+                  <a:srgbClr val="5B6472"/>
+                </a:solidFill>
+              </a:defRPr>
+            </a:pPr>
+            <a:r>
+              <a:rPr sz="1275" b="0">
+                <a:solidFill>
+                  <a:srgbClr val="5B6472"/>
+                </a:solidFill>
+              </a:rPr>
+              <a:t>дает нативный отклик внутри продукта</a:t>
+            </a:r>
+          </a:p>
+        </p:txBody>
+      </p:sp>
+      <p:sp>
+        <p:nvSpPr>
+          <p:cNvPr id="11" name="">
+            <a:extLst xmlns:a="http://schemas.openxmlformats.org/drawingml/2006/main">
+              <a:ext uri="{FF2B5EF4-FFF2-40B4-BE49-F238E27FC236}">
+                <a16:creationId xmlns:a16="http://schemas.microsoft.com/office/drawing/2014/main" id="{5730AA55-F912-4E71-8FE8-CC177FAFCFB5}"/>
+              </a:ext>
+            </a:extLst>
+          </p:cNvPr>
+          <p:cNvSpPr>
+            <a:spLocks xmlns:a="http://schemas.openxmlformats.org/drawingml/2006/main" noGrp="1"/>
+          </p:cNvSpPr>
+          <p:nvPr/>
+        </p:nvSpPr>
+        <p:spPr>
+          <a:xfrm xmlns:a="http://schemas.openxmlformats.org/drawingml/2006/main">
+            <a:off x="9645396" y="5110163"/>
+            <a:ext cx="7766304" cy="1257300"/>
+          </a:xfrm>
+          <a:prstGeom xmlns:a="http://schemas.openxmlformats.org/drawingml/2006/main" prst="roundRect">
+            <a:avLst>
+              <a:gd name="adj" fmla="val 6061"/>
+            </a:avLst>
+          </a:prstGeom>
+          <a:solidFill xmlns:a="http://schemas.openxmlformats.org/drawingml/2006/main">
+            <a:srgbClr val="FFE1DA"/>
+          </a:solidFill>
+          <a:ln xmlns:a="http://schemas.openxmlformats.org/drawingml/2006/main" w="9525">
+            <a:solidFill>
+              <a:srgbClr val="FFE1DA"/>
+            </a:solidFill>
+            <a:prstDash val="solid"/>
+          </a:ln>
+        </p:spPr>
+      </p:sp>
+      <p:sp>
+        <p:nvSpPr>
+          <p:cNvPr id="12" name="">
+            <a:extLst xmlns:a="http://schemas.openxmlformats.org/drawingml/2006/main">
+              <a:ext uri="{FF2B5EF4-FFF2-40B4-BE49-F238E27FC236}">
+                <a16:creationId xmlns:a16="http://schemas.microsoft.com/office/drawing/2014/main" id="{170445C8-8CEE-4D41-ABDB-4DFCC46DFA33}"/>
+              </a:ext>
+            </a:extLst>
+          </p:cNvPr>
+          <p:cNvSpPr>
+            <a:spLocks xmlns:a="http://schemas.openxmlformats.org/drawingml/2006/main" noGrp="1"/>
+          </p:cNvSpPr>
+          <p:nvPr/>
+        </p:nvSpPr>
+        <p:spPr>
+          <a:xfrm xmlns:a="http://schemas.openxmlformats.org/drawingml/2006/main">
+            <a:off x="9867900" y="5486400"/>
+            <a:ext cx="7315200" cy="247650"/>
+          </a:xfrm>
+          <a:prstGeom xmlns:a="http://schemas.openxmlformats.org/drawingml/2006/main" prst="rect">
+            <a:avLst/>
+          </a:prstGeom>
+        </p:spPr>
+        <p:txBody>
+          <a:bodyPr xmlns:a="http://schemas.openxmlformats.org/drawingml/2006/main" lIns="0" tIns="0" rIns="0" bIns="0"/>
+          <a:lstStyle xmlns:a="http://schemas.openxmlformats.org/drawingml/2006/main"/>
+          <a:p xmlns:a="http://schemas.openxmlformats.org/drawingml/2006/main">
+            <a:pPr>
+              <a:defRPr sz="1950" b="1">
                 <a:solidFill>
                   <a:srgbClr val="111827"/>
                 </a:solidFill>
               </a:defRPr>
             </a:pPr>
             <a:r>
-              <a:rPr sz="1800" b="0">
+              <a:rPr sz="1950" b="1">
                 <a:solidFill>
                   <a:srgbClr val="111827"/>
                 </a:solidFill>
               </a:rPr>
-              <a:t>можно откликнуться внутри продукта</a:t>
-            </a:r>
-          </a:p>
-        </p:txBody>
-      </p:sp>
-      <p:sp>
-        <p:nvSpPr>
-          <p:cNvPr id="9" name="">
-            <a:extLst xmlns:a="http://schemas.openxmlformats.org/drawingml/2006/main">
-              <a:ext uri="{FF2B5EF4-FFF2-40B4-BE49-F238E27FC236}">
-                <a16:creationId xmlns:a16="http://schemas.microsoft.com/office/drawing/2014/main" id="{9CC2AA3C-DAAC-4CC2-AAB8-ABA3B1AFD127}"/>
-              </a:ext>
-            </a:extLst>
-          </p:cNvPr>
-          <p:cNvSpPr>
-            <a:spLocks xmlns:a="http://schemas.openxmlformats.org/drawingml/2006/main" noGrp="1"/>
-          </p:cNvSpPr>
-          <p:nvPr/>
-        </p:nvSpPr>
-        <p:spPr>
-          <a:xfrm xmlns:a="http://schemas.openxmlformats.org/drawingml/2006/main">
-            <a:off x="9639300" y="5105400"/>
-            <a:ext cx="2571750" cy="571500"/>
-          </a:xfrm>
-          <a:prstGeom xmlns:a="http://schemas.openxmlformats.org/drawingml/2006/main" prst="rect">
-            <a:avLst/>
-          </a:prstGeom>
-        </p:spPr>
-        <p:txBody>
-          <a:bodyPr xmlns:a="http://schemas.openxmlformats.org/drawingml/2006/main" lIns="0" tIns="0" rIns="0" bIns="0"/>
-          <a:lstStyle xmlns:a="http://schemas.openxmlformats.org/drawingml/2006/main"/>
-          <a:p xmlns:a="http://schemas.openxmlformats.org/drawingml/2006/main">
-            <a:pPr>
-              <a:defRPr sz="4350" b="1">
-                <a:solidFill>
-                  <a:srgbClr val="E85D4A"/>
-                </a:solidFill>
-              </a:defRPr>
-            </a:pPr>
-            <a:r>
-              <a:rPr sz="4350" b="1">
-                <a:solidFill>
-                  <a:srgbClr val="E85D4A"/>
-                </a:solidFill>
-              </a:rPr>
               <a:t>HH</a:t>
             </a:r>
           </a:p>
@@ -6393,132 +6378,167 @@
       </p:sp>
       <p:sp>
         <p:nvSpPr>
-          <p:cNvPr id="10" name="">
-            <a:extLst xmlns:a="http://schemas.openxmlformats.org/drawingml/2006/main">
-              <a:ext uri="{FF2B5EF4-FFF2-40B4-BE49-F238E27FC236}">
-                <a16:creationId xmlns:a16="http://schemas.microsoft.com/office/drawing/2014/main" id="{EAE93197-6739-4B52-80C1-F02EAEBEABE3}"/>
-              </a:ext>
-            </a:extLst>
-          </p:cNvPr>
-          <p:cNvSpPr>
-            <a:spLocks xmlns:a="http://schemas.openxmlformats.org/drawingml/2006/main" noGrp="1"/>
-          </p:cNvSpPr>
-          <p:nvPr/>
-        </p:nvSpPr>
-        <p:spPr>
-          <a:xfrm xmlns:a="http://schemas.openxmlformats.org/drawingml/2006/main">
-            <a:off x="12382500" y="5276850"/>
-            <a:ext cx="5029200" cy="228600"/>
-          </a:xfrm>
-          <a:prstGeom xmlns:a="http://schemas.openxmlformats.org/drawingml/2006/main" prst="rect">
-            <a:avLst/>
-          </a:prstGeom>
-        </p:spPr>
-        <p:txBody>
-          <a:bodyPr xmlns:a="http://schemas.openxmlformats.org/drawingml/2006/main" lIns="0" tIns="0" rIns="0" bIns="0"/>
-          <a:lstStyle xmlns:a="http://schemas.openxmlformats.org/drawingml/2006/main"/>
-          <a:p xmlns:a="http://schemas.openxmlformats.org/drawingml/2006/main">
-            <a:pPr>
-              <a:defRPr sz="1800" b="0">
+          <p:cNvPr id="13" name="">
+            <a:extLst xmlns:a="http://schemas.openxmlformats.org/drawingml/2006/main">
+              <a:ext uri="{FF2B5EF4-FFF2-40B4-BE49-F238E27FC236}">
+                <a16:creationId xmlns:a16="http://schemas.microsoft.com/office/drawing/2014/main" id="{281EC1B9-9E45-4DC7-9562-036F1C4D1312}"/>
+              </a:ext>
+            </a:extLst>
+          </p:cNvPr>
+          <p:cNvSpPr>
+            <a:spLocks xmlns:a="http://schemas.openxmlformats.org/drawingml/2006/main" noGrp="1"/>
+          </p:cNvSpPr>
+          <p:nvPr/>
+        </p:nvSpPr>
+        <p:spPr>
+          <a:xfrm xmlns:a="http://schemas.openxmlformats.org/drawingml/2006/main">
+            <a:off x="9867900" y="5810250"/>
+            <a:ext cx="7315200" cy="171450"/>
+          </a:xfrm>
+          <a:prstGeom xmlns:a="http://schemas.openxmlformats.org/drawingml/2006/main" prst="rect">
+            <a:avLst/>
+          </a:prstGeom>
+        </p:spPr>
+        <p:txBody>
+          <a:bodyPr xmlns:a="http://schemas.openxmlformats.org/drawingml/2006/main" lIns="0" tIns="0" rIns="0" bIns="0"/>
+          <a:lstStyle xmlns:a="http://schemas.openxmlformats.org/drawingml/2006/main"/>
+          <a:p xmlns:a="http://schemas.openxmlformats.org/drawingml/2006/main">
+            <a:pPr>
+              <a:defRPr sz="1275" b="0">
+                <a:solidFill>
+                  <a:srgbClr val="5B6472"/>
+                </a:solidFill>
+              </a:defRPr>
+            </a:pPr>
+            <a:r>
+              <a:rPr sz="1275" b="0">
+                <a:solidFill>
+                  <a:srgbClr val="5B6472"/>
+                </a:solidFill>
+              </a:rPr>
+              <a:t>остается внешним источником, куда ведет ссылка</a:t>
+            </a:r>
+          </a:p>
+        </p:txBody>
+      </p:sp>
+      <p:sp>
+        <p:nvSpPr>
+          <p:cNvPr id="14" name="">
+            <a:extLst xmlns:a="http://schemas.openxmlformats.org/drawingml/2006/main">
+              <a:ext uri="{FF2B5EF4-FFF2-40B4-BE49-F238E27FC236}">
+                <a16:creationId xmlns:a16="http://schemas.microsoft.com/office/drawing/2014/main" id="{C2F0B68F-22C9-4128-B2B8-8E5BBBFC9F65}"/>
+              </a:ext>
+            </a:extLst>
+          </p:cNvPr>
+          <p:cNvSpPr>
+            <a:spLocks xmlns:a="http://schemas.openxmlformats.org/drawingml/2006/main" noGrp="1"/>
+          </p:cNvSpPr>
+          <p:nvPr/>
+        </p:nvSpPr>
+        <p:spPr>
+          <a:xfrm xmlns:a="http://schemas.openxmlformats.org/drawingml/2006/main">
+            <a:off x="9645396" y="6596063"/>
+            <a:ext cx="7766304" cy="1257300"/>
+          </a:xfrm>
+          <a:prstGeom xmlns:a="http://schemas.openxmlformats.org/drawingml/2006/main" prst="roundRect">
+            <a:avLst>
+              <a:gd name="adj" fmla="val 6061"/>
+            </a:avLst>
+          </a:prstGeom>
+          <a:solidFill xmlns:a="http://schemas.openxmlformats.org/drawingml/2006/main">
+            <a:srgbClr val="D7F4F1"/>
+          </a:solidFill>
+          <a:ln xmlns:a="http://schemas.openxmlformats.org/drawingml/2006/main" w="9525">
+            <a:solidFill>
+              <a:srgbClr val="D7F4F1"/>
+            </a:solidFill>
+            <a:prstDash val="solid"/>
+          </a:ln>
+        </p:spPr>
+      </p:sp>
+      <p:sp>
+        <p:nvSpPr>
+          <p:cNvPr id="15" name="">
+            <a:extLst xmlns:a="http://schemas.openxmlformats.org/drawingml/2006/main">
+              <a:ext uri="{FF2B5EF4-FFF2-40B4-BE49-F238E27FC236}">
+                <a16:creationId xmlns:a16="http://schemas.microsoft.com/office/drawing/2014/main" id="{D3DB06A1-788D-44B7-91D1-212E836CE335}"/>
+              </a:ext>
+            </a:extLst>
+          </p:cNvPr>
+          <p:cNvSpPr>
+            <a:spLocks xmlns:a="http://schemas.openxmlformats.org/drawingml/2006/main" noGrp="1"/>
+          </p:cNvSpPr>
+          <p:nvPr/>
+        </p:nvSpPr>
+        <p:spPr>
+          <a:xfrm xmlns:a="http://schemas.openxmlformats.org/drawingml/2006/main">
+            <a:off x="9867900" y="6972300"/>
+            <a:ext cx="7315200" cy="247650"/>
+          </a:xfrm>
+          <a:prstGeom xmlns:a="http://schemas.openxmlformats.org/drawingml/2006/main" prst="rect">
+            <a:avLst/>
+          </a:prstGeom>
+        </p:spPr>
+        <p:txBody>
+          <a:bodyPr xmlns:a="http://schemas.openxmlformats.org/drawingml/2006/main" lIns="0" tIns="0" rIns="0" bIns="0"/>
+          <a:lstStyle xmlns:a="http://schemas.openxmlformats.org/drawingml/2006/main"/>
+          <a:p xmlns:a="http://schemas.openxmlformats.org/drawingml/2006/main">
+            <a:pPr>
+              <a:defRPr sz="1950" b="1">
                 <a:solidFill>
                   <a:srgbClr val="111827"/>
                 </a:solidFill>
               </a:defRPr>
             </a:pPr>
             <a:r>
-              <a:rPr sz="1800" b="0">
+              <a:rPr sz="1950" b="1">
                 <a:solidFill>
                   <a:srgbClr val="111827"/>
                 </a:solidFill>
               </a:rPr>
-              <a:t>только поиск и внешний URL для отклика</a:t>
-            </a:r>
-          </a:p>
-        </p:txBody>
-      </p:sp>
-      <p:sp>
-        <p:nvSpPr>
-          <p:cNvPr id="11" name="">
-            <a:extLst xmlns:a="http://schemas.openxmlformats.org/drawingml/2006/main">
-              <a:ext uri="{FF2B5EF4-FFF2-40B4-BE49-F238E27FC236}">
-                <a16:creationId xmlns:a16="http://schemas.microsoft.com/office/drawing/2014/main" id="{A89BA761-4DD5-4B19-AD2A-D2453FEFEDD9}"/>
-              </a:ext>
-            </a:extLst>
-          </p:cNvPr>
-          <p:cNvSpPr>
-            <a:spLocks xmlns:a="http://schemas.openxmlformats.org/drawingml/2006/main" noGrp="1"/>
-          </p:cNvSpPr>
-          <p:nvPr/>
-        </p:nvSpPr>
-        <p:spPr>
-          <a:xfrm xmlns:a="http://schemas.openxmlformats.org/drawingml/2006/main">
-            <a:off x="9639300" y="5886450"/>
-            <a:ext cx="2571750" cy="571500"/>
-          </a:xfrm>
-          <a:prstGeom xmlns:a="http://schemas.openxmlformats.org/drawingml/2006/main" prst="rect">
-            <a:avLst/>
-          </a:prstGeom>
-        </p:spPr>
-        <p:txBody>
-          <a:bodyPr xmlns:a="http://schemas.openxmlformats.org/drawingml/2006/main" lIns="0" tIns="0" rIns="0" bIns="0"/>
-          <a:lstStyle xmlns:a="http://schemas.openxmlformats.org/drawingml/2006/main"/>
-          <a:p xmlns:a="http://schemas.openxmlformats.org/drawingml/2006/main">
-            <a:pPr>
-              <a:defRPr sz="4350" b="1">
-                <a:solidFill>
-                  <a:srgbClr val="0B8D9A"/>
-                </a:solidFill>
-              </a:defRPr>
-            </a:pPr>
-            <a:r>
-              <a:rPr sz="4350" b="1">
-                <a:solidFill>
-                  <a:srgbClr val="0B8D9A"/>
-                </a:solidFill>
-              </a:rPr>
-              <a:t>сервер</a:t>
-            </a:r>
-          </a:p>
-        </p:txBody>
-      </p:sp>
-      <p:sp>
-        <p:nvSpPr>
-          <p:cNvPr id="12" name="">
-            <a:extLst xmlns:a="http://schemas.openxmlformats.org/drawingml/2006/main">
-              <a:ext uri="{FF2B5EF4-FFF2-40B4-BE49-F238E27FC236}">
-                <a16:creationId xmlns:a16="http://schemas.microsoft.com/office/drawing/2014/main" id="{33B6E67B-0482-402F-A161-9AE3A6E80D5C}"/>
-              </a:ext>
-            </a:extLst>
-          </p:cNvPr>
-          <p:cNvSpPr>
-            <a:spLocks xmlns:a="http://schemas.openxmlformats.org/drawingml/2006/main" noGrp="1"/>
-          </p:cNvSpPr>
-          <p:nvPr/>
-        </p:nvSpPr>
-        <p:spPr>
-          <a:xfrm xmlns:a="http://schemas.openxmlformats.org/drawingml/2006/main">
-            <a:off x="12382500" y="6057900"/>
-            <a:ext cx="5029200" cy="228600"/>
-          </a:xfrm>
-          <a:prstGeom xmlns:a="http://schemas.openxmlformats.org/drawingml/2006/main" prst="rect">
-            <a:avLst/>
-          </a:prstGeom>
-        </p:spPr>
-        <p:txBody>
-          <a:bodyPr xmlns:a="http://schemas.openxmlformats.org/drawingml/2006/main" lIns="0" tIns="0" rIns="0" bIns="0"/>
-          <a:lstStyle xmlns:a="http://schemas.openxmlformats.org/drawingml/2006/main"/>
-          <a:p xmlns:a="http://schemas.openxmlformats.org/drawingml/2006/main">
-            <a:pPr>
-              <a:defRPr sz="1800" b="0">
-                <a:solidFill>
-                  <a:srgbClr val="111827"/>
-                </a:solidFill>
-              </a:defRPr>
-            </a:pPr>
-            <a:r>
-              <a:rPr sz="1800" b="0">
-                <a:solidFill>
-                  <a:srgbClr val="111827"/>
+              <a:t>Сервер</a:t>
+            </a:r>
+          </a:p>
+        </p:txBody>
+      </p:sp>
+      <p:sp>
+        <p:nvSpPr>
+          <p:cNvPr id="16" name="">
+            <a:extLst xmlns:a="http://schemas.openxmlformats.org/drawingml/2006/main">
+              <a:ext uri="{FF2B5EF4-FFF2-40B4-BE49-F238E27FC236}">
+                <a16:creationId xmlns:a16="http://schemas.microsoft.com/office/drawing/2014/main" id="{0872EC34-E559-449D-9312-2F7A3C6660E7}"/>
+              </a:ext>
+            </a:extLst>
+          </p:cNvPr>
+          <p:cNvSpPr>
+            <a:spLocks xmlns:a="http://schemas.openxmlformats.org/drawingml/2006/main" noGrp="1"/>
+          </p:cNvSpPr>
+          <p:nvPr/>
+        </p:nvSpPr>
+        <p:spPr>
+          <a:xfrm xmlns:a="http://schemas.openxmlformats.org/drawingml/2006/main">
+            <a:off x="9867900" y="7296150"/>
+            <a:ext cx="7315200" cy="171450"/>
+          </a:xfrm>
+          <a:prstGeom xmlns:a="http://schemas.openxmlformats.org/drawingml/2006/main" prst="rect">
+            <a:avLst/>
+          </a:prstGeom>
+        </p:spPr>
+        <p:txBody>
+          <a:bodyPr xmlns:a="http://schemas.openxmlformats.org/drawingml/2006/main" lIns="0" tIns="0" rIns="0" bIns="0"/>
+          <a:lstStyle xmlns:a="http://schemas.openxmlformats.org/drawingml/2006/main"/>
+          <a:p xmlns:a="http://schemas.openxmlformats.org/drawingml/2006/main">
+            <a:pPr>
+              <a:defRPr sz="1275" b="0">
+                <a:solidFill>
+                  <a:srgbClr val="5B6472"/>
+                </a:solidFill>
+              </a:defRPr>
+            </a:pPr>
+            <a:r>
+              <a:rPr sz="1275" b="0">
+                <a:solidFill>
+                  <a:srgbClr val="5B6472"/>
                 </a:solidFill>
               </a:rPr>
               <a:t>роль, владелец и статус проверяются в Convex</a:t>
@@ -6528,10 +6548,10 @@
       </p:sp>
       <p:sp>
         <p:nvSpPr>
-          <p:cNvPr id="13" name="source">
-            <a:extLst xmlns:a="http://schemas.openxmlformats.org/drawingml/2006/main">
-              <a:ext uri="{FF2B5EF4-FFF2-40B4-BE49-F238E27FC236}">
-                <a16:creationId xmlns:a16="http://schemas.microsoft.com/office/drawing/2014/main" id="{3A584EC3-4091-4CC1-9E6A-A12EAE0EF2ED}"/>
+          <p:cNvPr id="17" name="source">
+            <a:extLst xmlns:a="http://schemas.openxmlformats.org/drawingml/2006/main">
+              <a:ext uri="{FF2B5EF4-FFF2-40B4-BE49-F238E27FC236}">
+                <a16:creationId xmlns:a16="http://schemas.microsoft.com/office/drawing/2014/main" id="{F99F4940-3661-4289-B806-036DB4CC9094}"/>
               </a:ext>
             </a:extLst>
           </p:cNvPr>
@@ -6574,7 +6594,7 @@
     </p:spTree>
     <p:extLst>
       <p:ext uri="{BB962C8B-B14F-4D97-AF65-F5344CB8AC3E}">
-        <p14:creationId xmlns:p14="http://schemas.microsoft.com/office/powerpoint/2010/main" val="388016320"/>
+        <p14:creationId xmlns:p14="http://schemas.microsoft.com/office/powerpoint/2010/main" val="1943516525"/>
       </p:ext>
     </p:extLst>
   </p:cSld>
@@ -6605,7 +6625,7 @@
           <p:cNvPr id="1" name="bg">
             <a:extLst xmlns:a="http://schemas.openxmlformats.org/drawingml/2006/main">
               <a:ext uri="{FF2B5EF4-FFF2-40B4-BE49-F238E27FC236}">
-                <a16:creationId xmlns:a16="http://schemas.microsoft.com/office/drawing/2014/main" id="{911EFC9A-B73A-49A5-A2CD-5CB463AE926F}"/>
+                <a16:creationId xmlns:a16="http://schemas.microsoft.com/office/drawing/2014/main" id="{6EB68308-65F1-415D-A68E-9C19D5CDAD9E}"/>
               </a:ext>
             </a:extLst>
           </p:cNvPr>
@@ -6638,7 +6658,7 @@
           <p:cNvPr id="2" name="kicker">
             <a:extLst xmlns:a="http://schemas.openxmlformats.org/drawingml/2006/main">
               <a:ext uri="{FF2B5EF4-FFF2-40B4-BE49-F238E27FC236}">
-                <a16:creationId xmlns:a16="http://schemas.microsoft.com/office/drawing/2014/main" id="{D2A130C2-A63F-41EB-BA62-5F7EF77DA782}"/>
+                <a16:creationId xmlns:a16="http://schemas.microsoft.com/office/drawing/2014/main" id="{8F38419F-AE77-4D10-BC23-4D59C2E71EE4}"/>
               </a:ext>
             </a:extLst>
           </p:cNvPr>
@@ -6683,7 +6703,7 @@
           <p:cNvPr id="3" name="slide-title">
             <a:extLst xmlns:a="http://schemas.openxmlformats.org/drawingml/2006/main">
               <a:ext uri="{FF2B5EF4-FFF2-40B4-BE49-F238E27FC236}">
-                <a16:creationId xmlns:a16="http://schemas.microsoft.com/office/drawing/2014/main" id="{4892D296-9B74-41E0-B24A-D679E79D6EE6}"/>
+                <a16:creationId xmlns:a16="http://schemas.microsoft.com/office/drawing/2014/main" id="{472360DF-8240-41A0-913D-8432F6EAC8E7}"/>
               </a:ext>
             </a:extLst>
           </p:cNvPr>
@@ -6728,7 +6748,7 @@
           <p:cNvPr id="4" name="slide-title">
             <a:extLst xmlns:a="http://schemas.openxmlformats.org/drawingml/2006/main">
               <a:ext uri="{FF2B5EF4-FFF2-40B4-BE49-F238E27FC236}">
-                <a16:creationId xmlns:a16="http://schemas.microsoft.com/office/drawing/2014/main" id="{BC09B7C4-B12C-40B7-AE86-675BBF8659F7}"/>
+                <a16:creationId xmlns:a16="http://schemas.microsoft.com/office/drawing/2014/main" id="{A6473CF2-6A59-4787-8AFB-5EBE5E4F6E40}"/>
               </a:ext>
             </a:extLst>
           </p:cNvPr>
@@ -6773,7 +6793,7 @@
           <p:cNvPr id="5" name="">
             <a:extLst xmlns:a="http://schemas.openxmlformats.org/drawingml/2006/main">
               <a:ext uri="{FF2B5EF4-FFF2-40B4-BE49-F238E27FC236}">
-                <a16:creationId xmlns:a16="http://schemas.microsoft.com/office/drawing/2014/main" id="{EC296A6F-D838-438C-9E01-7509928432FC}"/>
+                <a16:creationId xmlns:a16="http://schemas.microsoft.com/office/drawing/2014/main" id="{270B3C00-EB63-4D4D-8EA3-711E59E45B9E}"/>
               </a:ext>
             </a:extLst>
           </p:cNvPr>
@@ -6818,7 +6838,7 @@
           <p:cNvPr id="6" name="">
             <a:extLst xmlns:a="http://schemas.openxmlformats.org/drawingml/2006/main">
               <a:ext uri="{FF2B5EF4-FFF2-40B4-BE49-F238E27FC236}">
-                <a16:creationId xmlns:a16="http://schemas.microsoft.com/office/drawing/2014/main" id="{8AB357BA-F72F-4F2F-93DA-066FABE71D50}"/>
+                <a16:creationId xmlns:a16="http://schemas.microsoft.com/office/drawing/2014/main" id="{91FADFEA-5D9C-4359-B9E9-C81B1B301DA4}"/>
               </a:ext>
             </a:extLst>
           </p:cNvPr>
@@ -6853,7 +6873,7 @@
           <p:cNvPr id="7" name="">
             <a:extLst xmlns:a="http://schemas.openxmlformats.org/drawingml/2006/main">
               <a:ext uri="{FF2B5EF4-FFF2-40B4-BE49-F238E27FC236}">
-                <a16:creationId xmlns:a16="http://schemas.microsoft.com/office/drawing/2014/main" id="{7400FB22-D838-4519-91D9-A5E9601C80AA}"/>
+                <a16:creationId xmlns:a16="http://schemas.microsoft.com/office/drawing/2014/main" id="{3BB14AAB-219B-42D5-BA26-A2D85F0CEE61}"/>
               </a:ext>
             </a:extLst>
           </p:cNvPr>
@@ -6898,7 +6918,7 @@
           <p:cNvPr id="8" name="">
             <a:extLst xmlns:a="http://schemas.openxmlformats.org/drawingml/2006/main">
               <a:ext uri="{FF2B5EF4-FFF2-40B4-BE49-F238E27FC236}">
-                <a16:creationId xmlns:a16="http://schemas.microsoft.com/office/drawing/2014/main" id="{CA4FCD66-B84F-4776-BF03-6037B73AB8BB}"/>
+                <a16:creationId xmlns:a16="http://schemas.microsoft.com/office/drawing/2014/main" id="{76ABCA40-6CC2-4AC5-9FEE-A2DAA5912428}"/>
               </a:ext>
             </a:extLst>
           </p:cNvPr>
@@ -6943,7 +6963,7 @@
           <p:cNvPr id="9" name="">
             <a:extLst xmlns:a="http://schemas.openxmlformats.org/drawingml/2006/main">
               <a:ext uri="{FF2B5EF4-FFF2-40B4-BE49-F238E27FC236}">
-                <a16:creationId xmlns:a16="http://schemas.microsoft.com/office/drawing/2014/main" id="{1B23DEEF-FFC7-4D77-B02C-4266C8F50706}"/>
+                <a16:creationId xmlns:a16="http://schemas.microsoft.com/office/drawing/2014/main" id="{2E4D6582-A8CA-4EA7-8803-E2CF5820CCA7}"/>
               </a:ext>
             </a:extLst>
           </p:cNvPr>
@@ -6978,7 +6998,7 @@
           <p:cNvPr id="10" name="">
             <a:extLst xmlns:a="http://schemas.openxmlformats.org/drawingml/2006/main">
               <a:ext uri="{FF2B5EF4-FFF2-40B4-BE49-F238E27FC236}">
-                <a16:creationId xmlns:a16="http://schemas.microsoft.com/office/drawing/2014/main" id="{CF01EB19-49DF-4B47-ABD3-2F42C71B9501}"/>
+                <a16:creationId xmlns:a16="http://schemas.microsoft.com/office/drawing/2014/main" id="{BDC5FBBF-9311-46C6-B720-2AB1FDC470F2}"/>
               </a:ext>
             </a:extLst>
           </p:cNvPr>
@@ -7023,7 +7043,7 @@
           <p:cNvPr id="11" name="">
             <a:extLst xmlns:a="http://schemas.openxmlformats.org/drawingml/2006/main">
               <a:ext uri="{FF2B5EF4-FFF2-40B4-BE49-F238E27FC236}">
-                <a16:creationId xmlns:a16="http://schemas.microsoft.com/office/drawing/2014/main" id="{BB3C6FD4-0D9A-46D5-B583-73E9964B8A56}"/>
+                <a16:creationId xmlns:a16="http://schemas.microsoft.com/office/drawing/2014/main" id="{8DFB6660-7F56-4DD4-86BB-4798F7F99FAB}"/>
               </a:ext>
             </a:extLst>
           </p:cNvPr>
@@ -7068,7 +7088,7 @@
           <p:cNvPr id="12" name="">
             <a:extLst xmlns:a="http://schemas.openxmlformats.org/drawingml/2006/main">
               <a:ext uri="{FF2B5EF4-FFF2-40B4-BE49-F238E27FC236}">
-                <a16:creationId xmlns:a16="http://schemas.microsoft.com/office/drawing/2014/main" id="{35B18B88-6EBA-461C-8BD4-7A491B478BC6}"/>
+                <a16:creationId xmlns:a16="http://schemas.microsoft.com/office/drawing/2014/main" id="{B61192E6-B693-4666-B87C-956651EA1F11}"/>
               </a:ext>
             </a:extLst>
           </p:cNvPr>
@@ -7103,7 +7123,7 @@
           <p:cNvPr id="13" name="">
             <a:extLst xmlns:a="http://schemas.openxmlformats.org/drawingml/2006/main">
               <a:ext uri="{FF2B5EF4-FFF2-40B4-BE49-F238E27FC236}">
-                <a16:creationId xmlns:a16="http://schemas.microsoft.com/office/drawing/2014/main" id="{AC02AD36-1344-4A21-A282-C531F5270170}"/>
+                <a16:creationId xmlns:a16="http://schemas.microsoft.com/office/drawing/2014/main" id="{C967CE4C-C845-449A-B22F-E485AF293014}"/>
               </a:ext>
             </a:extLst>
           </p:cNvPr>
@@ -7148,7 +7168,7 @@
           <p:cNvPr id="14" name="">
             <a:extLst xmlns:a="http://schemas.openxmlformats.org/drawingml/2006/main">
               <a:ext uri="{FF2B5EF4-FFF2-40B4-BE49-F238E27FC236}">
-                <a16:creationId xmlns:a16="http://schemas.microsoft.com/office/drawing/2014/main" id="{DF6D05AB-3740-4FF9-B3DA-6A787DBF8F8A}"/>
+                <a16:creationId xmlns:a16="http://schemas.microsoft.com/office/drawing/2014/main" id="{210EAE02-ED2F-4301-86DA-3BC2A8078074}"/>
               </a:ext>
             </a:extLst>
           </p:cNvPr>
@@ -7193,7 +7213,7 @@
           <p:cNvPr id="15" name="">
             <a:extLst xmlns:a="http://schemas.openxmlformats.org/drawingml/2006/main">
               <a:ext uri="{FF2B5EF4-FFF2-40B4-BE49-F238E27FC236}">
-                <a16:creationId xmlns:a16="http://schemas.microsoft.com/office/drawing/2014/main" id="{87C31451-4D7D-4154-A62A-0C44A5EF0271}"/>
+                <a16:creationId xmlns:a16="http://schemas.microsoft.com/office/drawing/2014/main" id="{7C3888D5-106F-45B8-8948-E8B3CC649225}"/>
               </a:ext>
             </a:extLst>
           </p:cNvPr>
@@ -7228,7 +7248,7 @@
           <p:cNvPr id="16" name="">
             <a:extLst xmlns:a="http://schemas.openxmlformats.org/drawingml/2006/main">
               <a:ext uri="{FF2B5EF4-FFF2-40B4-BE49-F238E27FC236}">
-                <a16:creationId xmlns:a16="http://schemas.microsoft.com/office/drawing/2014/main" id="{148B7C21-FFA7-4904-B5C3-1D4FBFFE2917}"/>
+                <a16:creationId xmlns:a16="http://schemas.microsoft.com/office/drawing/2014/main" id="{275EBF21-6CF5-42CA-A8F3-E31DE4E73671}"/>
               </a:ext>
             </a:extLst>
           </p:cNvPr>
@@ -7273,7 +7293,7 @@
           <p:cNvPr id="17" name="">
             <a:extLst xmlns:a="http://schemas.openxmlformats.org/drawingml/2006/main">
               <a:ext uri="{FF2B5EF4-FFF2-40B4-BE49-F238E27FC236}">
-                <a16:creationId xmlns:a16="http://schemas.microsoft.com/office/drawing/2014/main" id="{F007C1DE-C03A-40A9-9FD0-B878193838EA}"/>
+                <a16:creationId xmlns:a16="http://schemas.microsoft.com/office/drawing/2014/main" id="{034B28DF-AAB9-49CA-8CC1-B139F2996CAB}"/>
               </a:ext>
             </a:extLst>
           </p:cNvPr>
@@ -7316,7 +7336,7 @@
     </p:spTree>
     <p:extLst>
       <p:ext uri="{BB962C8B-B14F-4D97-AF65-F5344CB8AC3E}">
-        <p14:creationId xmlns:p14="http://schemas.microsoft.com/office/powerpoint/2010/main" val="1742947065"/>
+        <p14:creationId xmlns:p14="http://schemas.microsoft.com/office/powerpoint/2010/main" val="2061531331"/>
       </p:ext>
     </p:extLst>
   </p:cSld>
